--- a/src/assets/powerpoint/Stock Allocation.pptx
+++ b/src/assets/powerpoint/Stock Allocation.pptx
@@ -1,33 +1,37 @@
 
 <file path=ppt/presentation.xml><?xml version="1.0" encoding="utf-8"?>
-<p:presentation xmlns:a="http://schemas.openxmlformats.org/drawingml/2006/main" xmlns:r="http://schemas.openxmlformats.org/officeDocument/2006/relationships" xmlns:p="http://schemas.openxmlformats.org/presentationml/2006/main" saveSubsetFonts="1" embedTrueTypeFonts="true">
+<p:presentation xmlns:a="http://schemas.openxmlformats.org/drawingml/2006/main" xmlns:r="http://schemas.openxmlformats.org/officeDocument/2006/relationships" xmlns:p="http://schemas.openxmlformats.org/presentationml/2006/main" embedTrueTypeFonts="1" saveSubsetFonts="1">
   <p:sldMasterIdLst>
     <p:sldMasterId id="2147483648" r:id="rId1"/>
   </p:sldMasterIdLst>
   <p:sldIdLst>
-    <p:sldId id="256" r:id="rId6"/>
-    <p:sldId id="257" r:id="rId7"/>
-    <p:sldId id="258" r:id="rId8"/>
-    <p:sldId id="259" r:id="rId9"/>
-    <p:sldId id="260" r:id="rId10"/>
-    <p:sldId id="261" r:id="rId11"/>
-    <p:sldId id="262" r:id="rId12"/>
-    <p:sldId id="263" r:id="rId13"/>
-    <p:sldId id="264" r:id="rId14"/>
-    <p:sldId id="265" r:id="rId15"/>
-    <p:sldId id="266" r:id="rId16"/>
-    <p:sldId id="267" r:id="rId17"/>
+    <p:sldId id="256" r:id="rId2"/>
+    <p:sldId id="257" r:id="rId3"/>
+    <p:sldId id="258" r:id="rId4"/>
+    <p:sldId id="259" r:id="rId5"/>
+    <p:sldId id="260" r:id="rId6"/>
+    <p:sldId id="261" r:id="rId7"/>
+    <p:sldId id="262" r:id="rId8"/>
+    <p:sldId id="263" r:id="rId9"/>
+    <p:sldId id="264" r:id="rId10"/>
+    <p:sldId id="265" r:id="rId11"/>
+    <p:sldId id="266" r:id="rId12"/>
+    <p:sldId id="267" r:id="rId13"/>
   </p:sldIdLst>
   <p:sldSz cx="18288000" cy="10287000"/>
   <p:notesSz cx="6858000" cy="9144000"/>
   <p:embeddedFontLst>
     <p:embeddedFont>
-      <p:font typeface="Canva Sans" charset="1" panose="020B0503030501040103"/>
-      <p:regular r:id="rId18"/>
+      <p:font typeface="!Khmer OS Siemreap" panose="02000500000000020004" pitchFamily="2" charset="0"/>
+      <p:regular r:id="rId14"/>
     </p:embeddedFont>
     <p:embeddedFont>
-      <p:font typeface="Canva Sans Bold" charset="1" panose="020B0803030501040103"/>
-      <p:regular r:id="rId19"/>
+      <p:font typeface="Canva Sans" panose="020B0604020202020204" charset="0"/>
+      <p:regular r:id="rId15"/>
+    </p:embeddedFont>
+    <p:embeddedFont>
+      <p:font typeface="Canva Sans Bold" panose="020B0604020202020204" charset="0"/>
+      <p:regular r:id="rId16"/>
     </p:embeddedFont>
   </p:embeddedFontLst>
   <p:defaultTextStyle>
@@ -125,6 +129,22 @@
       </a:defRPr>
     </a:lvl9pPr>
   </p:defaultTextStyle>
+  <p:extLst>
+    <p:ext uri="{EFAFB233-063F-42B5-8137-9DF3F51BA10A}">
+      <p15:sldGuideLst xmlns:p15="http://schemas.microsoft.com/office/powerpoint/2012/main">
+        <p15:guide id="1" orient="horz" pos="2160">
+          <p15:clr>
+            <a:srgbClr val="A4A3A4"/>
+          </p15:clr>
+        </p15:guide>
+        <p15:guide id="2" pos="2880">
+          <p15:clr>
+            <a:srgbClr val="A4A3A4"/>
+          </p15:clr>
+        </p15:guide>
+      </p15:sldGuideLst>
+    </p:ext>
+  </p:extLst>
 </p:presentation>
 </file>
 
@@ -166,10 +186,9 @@
           <a:lstStyle/>
           <a:p>
             <a:r>
-              <a:rPr lang="en-US" smtClean="0"/>
+              <a:rPr lang="en-US"/>
               <a:t>Click to edit Master title style</a:t>
             </a:r>
-            <a:endParaRPr lang="en-US"/>
           </a:p>
         </p:txBody>
       </p:sp>
@@ -285,10 +304,9 @@
           </a:lstStyle>
           <a:p>
             <a:r>
-              <a:rPr lang="en-US" smtClean="0"/>
+              <a:rPr lang="en-US"/>
               <a:t>Click to edit Master subtitle style</a:t>
             </a:r>
-            <a:endParaRPr lang="en-US"/>
           </a:p>
         </p:txBody>
       </p:sp>
@@ -310,7 +328,7 @@
             <a:fld id="{1D8BD707-D9CF-40AE-B4C6-C98DA3205C09}" type="datetimeFigureOut">
               <a:rPr lang="en-US" smtClean="0"/>
               <a:pPr/>
-              <a:t>8/1/2011</a:t>
+              <a:t>8/4/2026</a:t>
             </a:fld>
             <a:endParaRPr lang="en-US"/>
           </a:p>
@@ -400,10 +418,9 @@
           <a:lstStyle/>
           <a:p>
             <a:r>
-              <a:rPr lang="en-US" smtClean="0"/>
+              <a:rPr lang="en-US"/>
               <a:t>Click to edit Master title style</a:t>
             </a:r>
-            <a:endParaRPr lang="en-US"/>
           </a:p>
         </p:txBody>
       </p:sp>
@@ -424,38 +441,37 @@
           <a:p>
             <a:pPr lvl="0"/>
             <a:r>
-              <a:rPr lang="en-US" smtClean="0"/>
+              <a:rPr lang="en-US"/>
               <a:t>Click to edit Master text styles</a:t>
             </a:r>
           </a:p>
           <a:p>
             <a:pPr lvl="1"/>
             <a:r>
-              <a:rPr lang="en-US" smtClean="0"/>
+              <a:rPr lang="en-US"/>
               <a:t>Second level</a:t>
             </a:r>
           </a:p>
           <a:p>
             <a:pPr lvl="2"/>
             <a:r>
-              <a:rPr lang="en-US" smtClean="0"/>
+              <a:rPr lang="en-US"/>
               <a:t>Third level</a:t>
             </a:r>
           </a:p>
           <a:p>
             <a:pPr lvl="3"/>
             <a:r>
-              <a:rPr lang="en-US" smtClean="0"/>
+              <a:rPr lang="en-US"/>
               <a:t>Fourth level</a:t>
             </a:r>
           </a:p>
           <a:p>
             <a:pPr lvl="4"/>
             <a:r>
-              <a:rPr lang="en-US" smtClean="0"/>
+              <a:rPr lang="en-US"/>
               <a:t>Fifth level</a:t>
             </a:r>
-            <a:endParaRPr lang="en-US"/>
           </a:p>
         </p:txBody>
       </p:sp>
@@ -477,7 +493,7 @@
             <a:fld id="{1D8BD707-D9CF-40AE-B4C6-C98DA3205C09}" type="datetimeFigureOut">
               <a:rPr lang="en-US" smtClean="0"/>
               <a:pPr/>
-              <a:t>8/1/2011</a:t>
+              <a:t>8/4/2026</a:t>
             </a:fld>
             <a:endParaRPr lang="en-US"/>
           </a:p>
@@ -572,10 +588,9 @@
           <a:lstStyle/>
           <a:p>
             <a:r>
-              <a:rPr lang="en-US" smtClean="0"/>
+              <a:rPr lang="en-US"/>
               <a:t>Click to edit Master title style</a:t>
             </a:r>
-            <a:endParaRPr lang="en-US"/>
           </a:p>
         </p:txBody>
       </p:sp>
@@ -601,38 +616,37 @@
           <a:p>
             <a:pPr lvl="0"/>
             <a:r>
-              <a:rPr lang="en-US" smtClean="0"/>
+              <a:rPr lang="en-US"/>
               <a:t>Click to edit Master text styles</a:t>
             </a:r>
           </a:p>
           <a:p>
             <a:pPr lvl="1"/>
             <a:r>
-              <a:rPr lang="en-US" smtClean="0"/>
+              <a:rPr lang="en-US"/>
               <a:t>Second level</a:t>
             </a:r>
           </a:p>
           <a:p>
             <a:pPr lvl="2"/>
             <a:r>
-              <a:rPr lang="en-US" smtClean="0"/>
+              <a:rPr lang="en-US"/>
               <a:t>Third level</a:t>
             </a:r>
           </a:p>
           <a:p>
             <a:pPr lvl="3"/>
             <a:r>
-              <a:rPr lang="en-US" smtClean="0"/>
+              <a:rPr lang="en-US"/>
               <a:t>Fourth level</a:t>
             </a:r>
           </a:p>
           <a:p>
             <a:pPr lvl="4"/>
             <a:r>
-              <a:rPr lang="en-US" smtClean="0"/>
+              <a:rPr lang="en-US"/>
               <a:t>Fifth level</a:t>
             </a:r>
-            <a:endParaRPr lang="en-US"/>
           </a:p>
         </p:txBody>
       </p:sp>
@@ -654,7 +668,7 @@
             <a:fld id="{1D8BD707-D9CF-40AE-B4C6-C98DA3205C09}" type="datetimeFigureOut">
               <a:rPr lang="en-US" smtClean="0"/>
               <a:pPr/>
-              <a:t>8/1/2011</a:t>
+              <a:t>8/4/2026</a:t>
             </a:fld>
             <a:endParaRPr lang="en-US"/>
           </a:p>
@@ -744,10 +758,9 @@
           <a:lstStyle/>
           <a:p>
             <a:r>
-              <a:rPr lang="en-US" smtClean="0"/>
+              <a:rPr lang="en-US"/>
               <a:t>Click to edit Master title style</a:t>
             </a:r>
-            <a:endParaRPr lang="en-US"/>
           </a:p>
         </p:txBody>
       </p:sp>
@@ -768,38 +781,37 @@
           <a:p>
             <a:pPr lvl="0"/>
             <a:r>
-              <a:rPr lang="en-US" smtClean="0"/>
+              <a:rPr lang="en-US"/>
               <a:t>Click to edit Master text styles</a:t>
             </a:r>
           </a:p>
           <a:p>
             <a:pPr lvl="1"/>
             <a:r>
-              <a:rPr lang="en-US" smtClean="0"/>
+              <a:rPr lang="en-US"/>
               <a:t>Second level</a:t>
             </a:r>
           </a:p>
           <a:p>
             <a:pPr lvl="2"/>
             <a:r>
-              <a:rPr lang="en-US" smtClean="0"/>
+              <a:rPr lang="en-US"/>
               <a:t>Third level</a:t>
             </a:r>
           </a:p>
           <a:p>
             <a:pPr lvl="3"/>
             <a:r>
-              <a:rPr lang="en-US" smtClean="0"/>
+              <a:rPr lang="en-US"/>
               <a:t>Fourth level</a:t>
             </a:r>
           </a:p>
           <a:p>
             <a:pPr lvl="4"/>
             <a:r>
-              <a:rPr lang="en-US" smtClean="0"/>
+              <a:rPr lang="en-US"/>
               <a:t>Fifth level</a:t>
             </a:r>
-            <a:endParaRPr lang="en-US"/>
           </a:p>
         </p:txBody>
       </p:sp>
@@ -821,7 +833,7 @@
             <a:fld id="{1D8BD707-D9CF-40AE-B4C6-C98DA3205C09}" type="datetimeFigureOut">
               <a:rPr lang="en-US" smtClean="0"/>
               <a:pPr/>
-              <a:t>8/1/2011</a:t>
+              <a:t>8/4/2026</a:t>
             </a:fld>
             <a:endParaRPr lang="en-US"/>
           </a:p>
@@ -920,10 +932,9 @@
           </a:lstStyle>
           <a:p>
             <a:r>
-              <a:rPr lang="en-US" smtClean="0"/>
+              <a:rPr lang="en-US"/>
               <a:t>Click to edit Master title style</a:t>
             </a:r>
-            <a:endParaRPr lang="en-US"/>
           </a:p>
         </p:txBody>
       </p:sp>
@@ -1040,7 +1051,7 @@
           <a:p>
             <a:pPr lvl="0"/>
             <a:r>
-              <a:rPr lang="en-US" smtClean="0"/>
+              <a:rPr lang="en-US"/>
               <a:t>Click to edit Master text styles</a:t>
             </a:r>
           </a:p>
@@ -1064,7 +1075,7 @@
             <a:fld id="{1D8BD707-D9CF-40AE-B4C6-C98DA3205C09}" type="datetimeFigureOut">
               <a:rPr lang="en-US" smtClean="0"/>
               <a:pPr/>
-              <a:t>8/1/2011</a:t>
+              <a:t>8/4/2026</a:t>
             </a:fld>
             <a:endParaRPr lang="en-US"/>
           </a:p>
@@ -1154,10 +1165,9 @@
           <a:lstStyle/>
           <a:p>
             <a:r>
-              <a:rPr lang="en-US" smtClean="0"/>
+              <a:rPr lang="en-US"/>
               <a:t>Click to edit Master title style</a:t>
             </a:r>
-            <a:endParaRPr lang="en-US"/>
           </a:p>
         </p:txBody>
       </p:sp>
@@ -1211,38 +1221,37 @@
           <a:p>
             <a:pPr lvl="0"/>
             <a:r>
-              <a:rPr lang="en-US" smtClean="0"/>
+              <a:rPr lang="en-US"/>
               <a:t>Click to edit Master text styles</a:t>
             </a:r>
           </a:p>
           <a:p>
             <a:pPr lvl="1"/>
             <a:r>
-              <a:rPr lang="en-US" smtClean="0"/>
+              <a:rPr lang="en-US"/>
               <a:t>Second level</a:t>
             </a:r>
           </a:p>
           <a:p>
             <a:pPr lvl="2"/>
             <a:r>
-              <a:rPr lang="en-US" smtClean="0"/>
+              <a:rPr lang="en-US"/>
               <a:t>Third level</a:t>
             </a:r>
           </a:p>
           <a:p>
             <a:pPr lvl="3"/>
             <a:r>
-              <a:rPr lang="en-US" smtClean="0"/>
+              <a:rPr lang="en-US"/>
               <a:t>Fourth level</a:t>
             </a:r>
           </a:p>
           <a:p>
             <a:pPr lvl="4"/>
             <a:r>
-              <a:rPr lang="en-US" smtClean="0"/>
+              <a:rPr lang="en-US"/>
               <a:t>Fifth level</a:t>
             </a:r>
-            <a:endParaRPr lang="en-US"/>
           </a:p>
         </p:txBody>
       </p:sp>
@@ -1296,38 +1305,37 @@
           <a:p>
             <a:pPr lvl="0"/>
             <a:r>
-              <a:rPr lang="en-US" smtClean="0"/>
+              <a:rPr lang="en-US"/>
               <a:t>Click to edit Master text styles</a:t>
             </a:r>
           </a:p>
           <a:p>
             <a:pPr lvl="1"/>
             <a:r>
-              <a:rPr lang="en-US" smtClean="0"/>
+              <a:rPr lang="en-US"/>
               <a:t>Second level</a:t>
             </a:r>
           </a:p>
           <a:p>
             <a:pPr lvl="2"/>
             <a:r>
-              <a:rPr lang="en-US" smtClean="0"/>
+              <a:rPr lang="en-US"/>
               <a:t>Third level</a:t>
             </a:r>
           </a:p>
           <a:p>
             <a:pPr lvl="3"/>
             <a:r>
-              <a:rPr lang="en-US" smtClean="0"/>
+              <a:rPr lang="en-US"/>
               <a:t>Fourth level</a:t>
             </a:r>
           </a:p>
           <a:p>
             <a:pPr lvl="4"/>
             <a:r>
-              <a:rPr lang="en-US" smtClean="0"/>
+              <a:rPr lang="en-US"/>
               <a:t>Fifth level</a:t>
             </a:r>
-            <a:endParaRPr lang="en-US"/>
           </a:p>
         </p:txBody>
       </p:sp>
@@ -1349,7 +1357,7 @@
             <a:fld id="{1D8BD707-D9CF-40AE-B4C6-C98DA3205C09}" type="datetimeFigureOut">
               <a:rPr lang="en-US" smtClean="0"/>
               <a:pPr/>
-              <a:t>8/1/2011</a:t>
+              <a:t>8/4/2026</a:t>
             </a:fld>
             <a:endParaRPr lang="en-US"/>
           </a:p>
@@ -1443,10 +1451,9 @@
           </a:lstStyle>
           <a:p>
             <a:r>
-              <a:rPr lang="en-US" smtClean="0"/>
+              <a:rPr lang="en-US"/>
               <a:t>Click to edit Master title style</a:t>
             </a:r>
-            <a:endParaRPr lang="en-US"/>
           </a:p>
         </p:txBody>
       </p:sp>
@@ -1509,7 +1516,7 @@
           <a:p>
             <a:pPr lvl="0"/>
             <a:r>
-              <a:rPr lang="en-US" smtClean="0"/>
+              <a:rPr lang="en-US"/>
               <a:t>Click to edit Master text styles</a:t>
             </a:r>
           </a:p>
@@ -1565,38 +1572,37 @@
           <a:p>
             <a:pPr lvl="0"/>
             <a:r>
-              <a:rPr lang="en-US" smtClean="0"/>
+              <a:rPr lang="en-US"/>
               <a:t>Click to edit Master text styles</a:t>
             </a:r>
           </a:p>
           <a:p>
             <a:pPr lvl="1"/>
             <a:r>
-              <a:rPr lang="en-US" smtClean="0"/>
+              <a:rPr lang="en-US"/>
               <a:t>Second level</a:t>
             </a:r>
           </a:p>
           <a:p>
             <a:pPr lvl="2"/>
             <a:r>
-              <a:rPr lang="en-US" smtClean="0"/>
+              <a:rPr lang="en-US"/>
               <a:t>Third level</a:t>
             </a:r>
           </a:p>
           <a:p>
             <a:pPr lvl="3"/>
             <a:r>
-              <a:rPr lang="en-US" smtClean="0"/>
+              <a:rPr lang="en-US"/>
               <a:t>Fourth level</a:t>
             </a:r>
           </a:p>
           <a:p>
             <a:pPr lvl="4"/>
             <a:r>
-              <a:rPr lang="en-US" smtClean="0"/>
+              <a:rPr lang="en-US"/>
               <a:t>Fifth level</a:t>
             </a:r>
-            <a:endParaRPr lang="en-US"/>
           </a:p>
         </p:txBody>
       </p:sp>
@@ -1659,7 +1665,7 @@
           <a:p>
             <a:pPr lvl="0"/>
             <a:r>
-              <a:rPr lang="en-US" smtClean="0"/>
+              <a:rPr lang="en-US"/>
               <a:t>Click to edit Master text styles</a:t>
             </a:r>
           </a:p>
@@ -1715,38 +1721,37 @@
           <a:p>
             <a:pPr lvl="0"/>
             <a:r>
-              <a:rPr lang="en-US" smtClean="0"/>
+              <a:rPr lang="en-US"/>
               <a:t>Click to edit Master text styles</a:t>
             </a:r>
           </a:p>
           <a:p>
             <a:pPr lvl="1"/>
             <a:r>
-              <a:rPr lang="en-US" smtClean="0"/>
+              <a:rPr lang="en-US"/>
               <a:t>Second level</a:t>
             </a:r>
           </a:p>
           <a:p>
             <a:pPr lvl="2"/>
             <a:r>
-              <a:rPr lang="en-US" smtClean="0"/>
+              <a:rPr lang="en-US"/>
               <a:t>Third level</a:t>
             </a:r>
           </a:p>
           <a:p>
             <a:pPr lvl="3"/>
             <a:r>
-              <a:rPr lang="en-US" smtClean="0"/>
+              <a:rPr lang="en-US"/>
               <a:t>Fourth level</a:t>
             </a:r>
           </a:p>
           <a:p>
             <a:pPr lvl="4"/>
             <a:r>
-              <a:rPr lang="en-US" smtClean="0"/>
+              <a:rPr lang="en-US"/>
               <a:t>Fifth level</a:t>
             </a:r>
-            <a:endParaRPr lang="en-US"/>
           </a:p>
         </p:txBody>
       </p:sp>
@@ -1768,7 +1773,7 @@
             <a:fld id="{1D8BD707-D9CF-40AE-B4C6-C98DA3205C09}" type="datetimeFigureOut">
               <a:rPr lang="en-US" smtClean="0"/>
               <a:pPr/>
-              <a:t>8/1/2011</a:t>
+              <a:t>8/4/2026</a:t>
             </a:fld>
             <a:endParaRPr lang="en-US"/>
           </a:p>
@@ -1858,10 +1863,9 @@
           <a:lstStyle/>
           <a:p>
             <a:r>
-              <a:rPr lang="en-US" smtClean="0"/>
+              <a:rPr lang="en-US"/>
               <a:t>Click to edit Master title style</a:t>
             </a:r>
-            <a:endParaRPr lang="en-US"/>
           </a:p>
         </p:txBody>
       </p:sp>
@@ -1883,7 +1887,7 @@
             <a:fld id="{1D8BD707-D9CF-40AE-B4C6-C98DA3205C09}" type="datetimeFigureOut">
               <a:rPr lang="en-US" smtClean="0"/>
               <a:pPr/>
-              <a:t>8/1/2011</a:t>
+              <a:t>8/4/2026</a:t>
             </a:fld>
             <a:endParaRPr lang="en-US"/>
           </a:p>
@@ -1975,7 +1979,7 @@
             <a:fld id="{1D8BD707-D9CF-40AE-B4C6-C98DA3205C09}" type="datetimeFigureOut">
               <a:rPr lang="en-US" smtClean="0"/>
               <a:pPr/>
-              <a:t>8/1/2011</a:t>
+              <a:t>8/4/2026</a:t>
             </a:fld>
             <a:endParaRPr lang="en-US"/>
           </a:p>
@@ -2074,10 +2078,9 @@
           </a:lstStyle>
           <a:p>
             <a:r>
-              <a:rPr lang="en-US" smtClean="0"/>
+              <a:rPr lang="en-US"/>
               <a:t>Click to edit Master title style</a:t>
             </a:r>
-            <a:endParaRPr lang="en-US"/>
           </a:p>
         </p:txBody>
       </p:sp>
@@ -2131,38 +2134,37 @@
           <a:p>
             <a:pPr lvl="0"/>
             <a:r>
-              <a:rPr lang="en-US" smtClean="0"/>
+              <a:rPr lang="en-US"/>
               <a:t>Click to edit Master text styles</a:t>
             </a:r>
           </a:p>
           <a:p>
             <a:pPr lvl="1"/>
             <a:r>
-              <a:rPr lang="en-US" smtClean="0"/>
+              <a:rPr lang="en-US"/>
               <a:t>Second level</a:t>
             </a:r>
           </a:p>
           <a:p>
             <a:pPr lvl="2"/>
             <a:r>
-              <a:rPr lang="en-US" smtClean="0"/>
+              <a:rPr lang="en-US"/>
               <a:t>Third level</a:t>
             </a:r>
           </a:p>
           <a:p>
             <a:pPr lvl="3"/>
             <a:r>
-              <a:rPr lang="en-US" smtClean="0"/>
+              <a:rPr lang="en-US"/>
               <a:t>Fourth level</a:t>
             </a:r>
           </a:p>
           <a:p>
             <a:pPr lvl="4"/>
             <a:r>
-              <a:rPr lang="en-US" smtClean="0"/>
+              <a:rPr lang="en-US"/>
               <a:t>Fifth level</a:t>
             </a:r>
-            <a:endParaRPr lang="en-US"/>
           </a:p>
         </p:txBody>
       </p:sp>
@@ -2225,7 +2227,7 @@
           <a:p>
             <a:pPr lvl="0"/>
             <a:r>
-              <a:rPr lang="en-US" smtClean="0"/>
+              <a:rPr lang="en-US"/>
               <a:t>Click to edit Master text styles</a:t>
             </a:r>
           </a:p>
@@ -2249,7 +2251,7 @@
             <a:fld id="{1D8BD707-D9CF-40AE-B4C6-C98DA3205C09}" type="datetimeFigureOut">
               <a:rPr lang="en-US" smtClean="0"/>
               <a:pPr/>
-              <a:t>8/1/2011</a:t>
+              <a:t>8/4/2026</a:t>
             </a:fld>
             <a:endParaRPr lang="en-US"/>
           </a:p>
@@ -2348,10 +2350,9 @@
           </a:lstStyle>
           <a:p>
             <a:r>
-              <a:rPr lang="en-US" smtClean="0"/>
+              <a:rPr lang="en-US"/>
               <a:t>Click to edit Master title style</a:t>
             </a:r>
-            <a:endParaRPr lang="en-US"/>
           </a:p>
         </p:txBody>
       </p:sp>
@@ -2475,7 +2476,7 @@
           <a:p>
             <a:pPr lvl="0"/>
             <a:r>
-              <a:rPr lang="en-US" smtClean="0"/>
+              <a:rPr lang="en-US"/>
               <a:t>Click to edit Master text styles</a:t>
             </a:r>
           </a:p>
@@ -2499,7 +2500,7 @@
             <a:fld id="{1D8BD707-D9CF-40AE-B4C6-C98DA3205C09}" type="datetimeFigureOut">
               <a:rPr lang="en-US" smtClean="0"/>
               <a:pPr/>
-              <a:t>8/1/2011</a:t>
+              <a:t>8/4/2026</a:t>
             </a:fld>
             <a:endParaRPr lang="en-US"/>
           </a:p>
@@ -2604,10 +2605,9 @@
           <a:lstStyle/>
           <a:p>
             <a:r>
-              <a:rPr lang="en-US" smtClean="0"/>
+              <a:rPr lang="en-US"/>
               <a:t>Click to edit Master title style</a:t>
             </a:r>
-            <a:endParaRPr lang="en-US"/>
           </a:p>
         </p:txBody>
       </p:sp>
@@ -2638,38 +2638,37 @@
           <a:p>
             <a:pPr lvl="0"/>
             <a:r>
-              <a:rPr lang="en-US" smtClean="0"/>
+              <a:rPr lang="en-US"/>
               <a:t>Click to edit Master text styles</a:t>
             </a:r>
           </a:p>
           <a:p>
             <a:pPr lvl="1"/>
             <a:r>
-              <a:rPr lang="en-US" smtClean="0"/>
+              <a:rPr lang="en-US"/>
               <a:t>Second level</a:t>
             </a:r>
           </a:p>
           <a:p>
             <a:pPr lvl="2"/>
             <a:r>
-              <a:rPr lang="en-US" smtClean="0"/>
+              <a:rPr lang="en-US"/>
               <a:t>Third level</a:t>
             </a:r>
           </a:p>
           <a:p>
             <a:pPr lvl="3"/>
             <a:r>
-              <a:rPr lang="en-US" smtClean="0"/>
+              <a:rPr lang="en-US"/>
               <a:t>Fourth level</a:t>
             </a:r>
           </a:p>
           <a:p>
             <a:pPr lvl="4"/>
             <a:r>
-              <a:rPr lang="en-US" smtClean="0"/>
+              <a:rPr lang="en-US"/>
               <a:t>Fifth level</a:t>
             </a:r>
-            <a:endParaRPr lang="en-US"/>
           </a:p>
         </p:txBody>
       </p:sp>
@@ -2709,7 +2708,7 @@
             <a:fld id="{1D8BD707-D9CF-40AE-B4C6-C98DA3205C09}" type="datetimeFigureOut">
               <a:rPr lang="en-US" smtClean="0"/>
               <a:pPr/>
-              <a:t>8/1/2011</a:t>
+              <a:t>8/4/2026</a:t>
             </a:fld>
             <a:endParaRPr lang="en-US"/>
           </a:p>
@@ -3064,7 +3063,7 @@
 </file>
 
 <file path=ppt/slides/slide1.xml><?xml version="1.0" encoding="utf-8"?>
-<p:sld xmlns:p="http://schemas.openxmlformats.org/presentationml/2006/main" xmlns:a="http://schemas.openxmlformats.org/drawingml/2006/main" xmlns:r="http://schemas.openxmlformats.org/officeDocument/2006/relationships">
+<p:sld xmlns:a="http://schemas.openxmlformats.org/drawingml/2006/main" xmlns:r="http://schemas.openxmlformats.org/officeDocument/2006/relationships" xmlns:p="http://schemas.openxmlformats.org/presentationml/2006/main">
   <p:cSld>
     <p:spTree>
       <p:nvGrpSpPr>
@@ -3082,12 +3081,12 @@
       </p:grpSpPr>
       <p:sp>
         <p:nvSpPr>
-          <p:cNvPr name="Freeform 2" id="2"/>
+          <p:cNvPr id="2" name="Freeform 2"/>
           <p:cNvSpPr/>
           <p:nvPr/>
         </p:nvSpPr>
         <p:spPr>
-          <a:xfrm flipH="false" flipV="false" rot="0">
+          <a:xfrm>
             <a:off x="0" y="0"/>
             <a:ext cx="18288000" cy="10287000"/>
           </a:xfrm>
@@ -3096,9 +3095,9 @@
             <a:gdLst/>
             <a:ahLst/>
             <a:cxnLst/>
-            <a:rect r="r" b="b" t="t" l="l"/>
+            <a:rect l="l" t="t" r="r" b="b"/>
             <a:pathLst>
-              <a:path h="10287000" w="18288000">
+              <a:path w="18288000" h="10287000">
                 <a:moveTo>
                   <a:pt x="0" y="0"/>
                 </a:moveTo>
@@ -3121,19 +3120,26 @@
           <a:blipFill>
             <a:blip r:embed="rId2"/>
             <a:stretch>
-              <a:fillRect l="0" t="-82" r="0" b="-82"/>
+              <a:fillRect t="-82" b="-82"/>
             </a:stretch>
           </a:blipFill>
         </p:spPr>
-      </p:sp>
-      <p:sp>
-        <p:nvSpPr>
-          <p:cNvPr name="Freeform 3" id="3"/>
+        <p:txBody>
+          <a:bodyPr/>
+          <a:lstStyle/>
+          <a:p>
+            <a:endParaRPr lang="en-US"/>
+          </a:p>
+        </p:txBody>
+      </p:sp>
+      <p:sp>
+        <p:nvSpPr>
+          <p:cNvPr id="3" name="Freeform 3"/>
           <p:cNvSpPr/>
           <p:nvPr/>
         </p:nvSpPr>
         <p:spPr>
-          <a:xfrm flipH="false" flipV="false" rot="0">
+          <a:xfrm>
             <a:off x="521366" y="521214"/>
             <a:ext cx="1775126" cy="1963844"/>
           </a:xfrm>
@@ -3142,9 +3148,9 @@
             <a:gdLst/>
             <a:ahLst/>
             <a:cxnLst/>
-            <a:rect r="r" b="b" t="t" l="l"/>
+            <a:rect l="l" t="t" r="r" b="b"/>
             <a:pathLst>
-              <a:path h="1963844" w="1775126">
+              <a:path w="1775126" h="1963844">
                 <a:moveTo>
                   <a:pt x="0" y="0"/>
                 </a:moveTo>
@@ -3167,19 +3173,26 @@
           <a:blipFill>
             <a:blip r:embed="rId3"/>
             <a:stretch>
-              <a:fillRect l="0" t="0" r="0" b="0"/>
+              <a:fillRect/>
             </a:stretch>
           </a:blipFill>
         </p:spPr>
-      </p:sp>
-      <p:sp>
-        <p:nvSpPr>
-          <p:cNvPr name="TextBox 4" id="4"/>
-          <p:cNvSpPr txBox="true"/>
+        <p:txBody>
+          <a:bodyPr/>
+          <a:lstStyle/>
+          <a:p>
+            <a:endParaRPr lang="en-US"/>
+          </a:p>
+        </p:txBody>
+      </p:sp>
+      <p:sp>
+        <p:nvSpPr>
+          <p:cNvPr id="4" name="TextBox 4"/>
+          <p:cNvSpPr txBox="1"/>
           <p:nvPr/>
         </p:nvSpPr>
         <p:spPr>
-          <a:xfrm rot="0">
+          <a:xfrm>
             <a:off x="1028700" y="4051237"/>
             <a:ext cx="16230600" cy="1965451"/>
           </a:xfrm>
@@ -3188,7 +3201,7 @@
           </a:prstGeom>
         </p:spPr>
         <p:txBody>
-          <a:bodyPr anchor="t" rtlCol="false" tIns="0" lIns="0" bIns="0" rIns="0">
+          <a:bodyPr lIns="0" tIns="0" rIns="0" bIns="0" rtlCol="0" anchor="t">
             <a:spAutoFit/>
           </a:bodyPr>
           <a:lstStyle/>
@@ -3225,7 +3238,7 @@
 </file>
 
 <file path=ppt/slides/slide10.xml><?xml version="1.0" encoding="utf-8"?>
-<p:sld xmlns:p="http://schemas.openxmlformats.org/presentationml/2006/main" xmlns:a="http://schemas.openxmlformats.org/drawingml/2006/main" xmlns:r="http://schemas.openxmlformats.org/officeDocument/2006/relationships">
+<p:sld xmlns:a="http://schemas.openxmlformats.org/drawingml/2006/main" xmlns:r="http://schemas.openxmlformats.org/officeDocument/2006/relationships" xmlns:p="http://schemas.openxmlformats.org/presentationml/2006/main">
   <p:cSld>
     <p:spTree>
       <p:nvGrpSpPr>
@@ -3243,12 +3256,12 @@
       </p:grpSpPr>
       <p:sp>
         <p:nvSpPr>
-          <p:cNvPr name="Freeform 2" id="2"/>
+          <p:cNvPr id="2" name="Freeform 2"/>
           <p:cNvSpPr/>
           <p:nvPr/>
         </p:nvSpPr>
         <p:spPr>
-          <a:xfrm flipH="false" flipV="false" rot="0">
+          <a:xfrm>
             <a:off x="2702043" y="0"/>
             <a:ext cx="12883914" cy="10287000"/>
           </a:xfrm>
@@ -3257,9 +3270,9 @@
             <a:gdLst/>
             <a:ahLst/>
             <a:cxnLst/>
-            <a:rect r="r" b="b" t="t" l="l"/>
+            <a:rect l="l" t="t" r="r" b="b"/>
             <a:pathLst>
-              <a:path h="10287000" w="12883914">
+              <a:path w="12883914" h="10287000">
                 <a:moveTo>
                   <a:pt x="0" y="0"/>
                 </a:moveTo>
@@ -3282,10 +3295,17 @@
           <a:blipFill>
             <a:blip r:embed="rId2"/>
             <a:stretch>
-              <a:fillRect l="0" t="0" r="0" b="0"/>
+              <a:fillRect/>
             </a:stretch>
           </a:blipFill>
         </p:spPr>
+        <p:txBody>
+          <a:bodyPr/>
+          <a:lstStyle/>
+          <a:p>
+            <a:endParaRPr lang="en-US"/>
+          </a:p>
+        </p:txBody>
       </p:sp>
     </p:spTree>
   </p:cSld>
@@ -3296,7 +3316,7 @@
 </file>
 
 <file path=ppt/slides/slide11.xml><?xml version="1.0" encoding="utf-8"?>
-<p:sld xmlns:p="http://schemas.openxmlformats.org/presentationml/2006/main" xmlns:a="http://schemas.openxmlformats.org/drawingml/2006/main">
+<p:sld xmlns:a="http://schemas.openxmlformats.org/drawingml/2006/main" xmlns:r="http://schemas.openxmlformats.org/officeDocument/2006/relationships" xmlns:p="http://schemas.openxmlformats.org/presentationml/2006/main">
   <p:cSld>
     <p:spTree>
       <p:nvGrpSpPr>
@@ -3314,21 +3334,21 @@
       </p:grpSpPr>
       <p:sp>
         <p:nvSpPr>
-          <p:cNvPr name="TextBox 2" id="2"/>
-          <p:cNvSpPr txBox="true"/>
+          <p:cNvPr id="2" name="TextBox 2"/>
+          <p:cNvSpPr txBox="1"/>
           <p:nvPr/>
         </p:nvSpPr>
         <p:spPr>
-          <a:xfrm rot="0">
+          <a:xfrm>
             <a:off x="1028700" y="952500"/>
-            <a:ext cx="16230600" cy="2089150"/>
+            <a:ext cx="16230600" cy="2039213"/>
           </a:xfrm>
           <a:prstGeom prst="rect">
             <a:avLst/>
           </a:prstGeom>
         </p:spPr>
         <p:txBody>
-          <a:bodyPr anchor="t" rtlCol="false" tIns="0" lIns="0" bIns="0" rIns="0">
+          <a:bodyPr lIns="0" tIns="0" rIns="0" bIns="0" rtlCol="0" anchor="t">
             <a:spAutoFit/>
           </a:bodyPr>
           <a:lstStyle/>
@@ -3342,20 +3362,20 @@
               </a:spcBef>
             </a:pPr>
             <a:r>
-              <a:rPr lang="en-US" b="true" sz="3999">
-                <a:solidFill>
-                  <a:srgbClr val="000000"/>
-                </a:solidFill>
-                <a:latin typeface="Canva Sans Bold"/>
+              <a:rPr lang="en-US" sz="2000" b="1" dirty="0">
+                <a:solidFill>
+                  <a:srgbClr val="000000"/>
+                </a:solidFill>
+                <a:latin typeface="!Khmer OS Siemreap" panose="02000500000000020004" pitchFamily="2" charset="0"/>
                 <a:ea typeface="Canva Sans Bold"/>
-                <a:cs typeface="Canva Sans Bold"/>
+                <a:cs typeface="!Khmer OS Siemreap" panose="02000500000000020004" pitchFamily="2" charset="0"/>
                 <a:sym typeface="Canva Sans Bold"/>
               </a:rPr>
               <a:t>Confirm Order Reserve</a:t>
             </a:r>
           </a:p>
           <a:p>
-            <a:pPr algn="l" marL="863596" indent="-431798" lvl="1">
+            <a:pPr marL="863596" lvl="1" indent="-431798" algn="l">
               <a:lnSpc>
                 <a:spcPts val="5599"/>
               </a:lnSpc>
@@ -3363,20 +3383,77 @@
               <a:buChar char="•"/>
             </a:pPr>
             <a:r>
-              <a:rPr lang="en-US" sz="3999">
-                <a:solidFill>
-                  <a:srgbClr val="000000"/>
-                </a:solidFill>
-                <a:latin typeface="Canva Sans"/>
-                <a:ea typeface="Canva Sans"/>
-                <a:cs typeface="Canva Sans"/>
-                <a:sym typeface="Canva Sans"/>
-              </a:rPr>
-              <a:t>If it is allocated, we see it in a table of tab "Allocated".</a:t>
-            </a:r>
-          </a:p>
-          <a:p>
-            <a:pPr algn="l" marL="863596" indent="-431798" lvl="1">
+              <a:rPr lang="km-KH" sz="2000" dirty="0">
+                <a:solidFill>
+                  <a:srgbClr val="000000"/>
+                </a:solidFill>
+                <a:latin typeface="!Khmer OS Siemreap" panose="02000500000000020004" pitchFamily="2" charset="0"/>
+                <a:ea typeface="Canva Sans"/>
+                <a:cs typeface="!Khmer OS Siemreap" panose="02000500000000020004" pitchFamily="2" charset="0"/>
+                <a:sym typeface="Canva Sans"/>
+              </a:rPr>
+              <a:t>ប្រើសិនបើវា </a:t>
+            </a:r>
+            <a:r>
+              <a:rPr lang="en-US" sz="2000" dirty="0">
+                <a:solidFill>
+                  <a:srgbClr val="000000"/>
+                </a:solidFill>
+                <a:latin typeface="!Khmer OS Siemreap" panose="02000500000000020004" pitchFamily="2" charset="0"/>
+                <a:ea typeface="Canva Sans"/>
+                <a:cs typeface="!Khmer OS Siemreap" panose="02000500000000020004" pitchFamily="2" charset="0"/>
+                <a:sym typeface="Canva Sans"/>
+              </a:rPr>
+              <a:t>allocated </a:t>
+            </a:r>
+            <a:r>
+              <a:rPr lang="km-KH" sz="2000" dirty="0">
+                <a:solidFill>
+                  <a:srgbClr val="000000"/>
+                </a:solidFill>
+                <a:latin typeface="!Khmer OS Siemreap" panose="02000500000000020004" pitchFamily="2" charset="0"/>
+                <a:ea typeface="Canva Sans"/>
+                <a:cs typeface="!Khmer OS Siemreap" panose="02000500000000020004" pitchFamily="2" charset="0"/>
+                <a:sym typeface="Canva Sans"/>
+              </a:rPr>
+              <a:t>នោះពួកយើងឃើញវានៅក្នុងតារាងនៃ</a:t>
+            </a:r>
+            <a:r>
+              <a:rPr lang="en-US" sz="2000" dirty="0">
+                <a:solidFill>
+                  <a:srgbClr val="000000"/>
+                </a:solidFill>
+                <a:latin typeface="!Khmer OS Siemreap" panose="02000500000000020004" pitchFamily="2" charset="0"/>
+                <a:ea typeface="Canva Sans"/>
+                <a:cs typeface="!Khmer OS Siemreap" panose="02000500000000020004" pitchFamily="2" charset="0"/>
+                <a:sym typeface="Canva Sans"/>
+              </a:rPr>
+              <a:t> tab "Allocated“</a:t>
+            </a:r>
+            <a:r>
+              <a:rPr lang="km-KH" sz="2000" dirty="0">
+                <a:solidFill>
+                  <a:srgbClr val="000000"/>
+                </a:solidFill>
+                <a:latin typeface="!Khmer OS Siemreap" panose="02000500000000020004" pitchFamily="2" charset="0"/>
+                <a:ea typeface="Canva Sans"/>
+                <a:cs typeface="!Khmer OS Siemreap" panose="02000500000000020004" pitchFamily="2" charset="0"/>
+                <a:sym typeface="Canva Sans"/>
+              </a:rPr>
+              <a:t>។</a:t>
+            </a:r>
+            <a:endParaRPr lang="en-US" sz="2000" dirty="0">
+              <a:solidFill>
+                <a:srgbClr val="000000"/>
+              </a:solidFill>
+              <a:latin typeface="!Khmer OS Siemreap" panose="02000500000000020004" pitchFamily="2" charset="0"/>
+              <a:ea typeface="Canva Sans"/>
+              <a:cs typeface="!Khmer OS Siemreap" panose="02000500000000020004" pitchFamily="2" charset="0"/>
+              <a:sym typeface="Canva Sans"/>
+            </a:endParaRPr>
+          </a:p>
+          <a:p>
+            <a:pPr marL="863596" lvl="1" indent="-431798">
               <a:lnSpc>
                 <a:spcPts val="5599"/>
               </a:lnSpc>
@@ -3384,13 +3461,163 @@
               <a:buChar char="•"/>
             </a:pPr>
             <a:r>
-              <a:rPr lang="en-US" sz="3999">
-                <a:solidFill>
-                  <a:srgbClr val="000000"/>
-                </a:solidFill>
-                <a:latin typeface="Canva Sans"/>
-                <a:ea typeface="Canva Sans"/>
-                <a:cs typeface="Canva Sans"/>
+              <a:rPr lang="km-KH" sz="2000" dirty="0">
+                <a:solidFill>
+                  <a:srgbClr val="000000"/>
+                </a:solidFill>
+                <a:latin typeface="!Khmer OS Siemreap" panose="02000500000000020004" pitchFamily="2" charset="0"/>
+                <a:ea typeface="Canva Sans"/>
+                <a:cs typeface="!Khmer OS Siemreap" panose="02000500000000020004" pitchFamily="2" charset="0"/>
+                <a:sym typeface="Canva Sans"/>
+              </a:rPr>
+              <a:t>ប្រសិនបើវា </a:t>
+            </a:r>
+            <a:r>
+              <a:rPr lang="en-US" sz="2000" dirty="0">
+                <a:solidFill>
+                  <a:srgbClr val="000000"/>
+                </a:solidFill>
+                <a:latin typeface="!Khmer OS Siemreap" panose="02000500000000020004" pitchFamily="2" charset="0"/>
+                <a:ea typeface="Canva Sans"/>
+                <a:cs typeface="!Khmer OS Siemreap" panose="02000500000000020004" pitchFamily="2" charset="0"/>
+                <a:sym typeface="Canva Sans"/>
+              </a:rPr>
+              <a:t>unallocated </a:t>
+            </a:r>
+            <a:r>
+              <a:rPr lang="km-KH" sz="2000" dirty="0">
+                <a:solidFill>
+                  <a:srgbClr val="000000"/>
+                </a:solidFill>
+                <a:latin typeface="!Khmer OS Siemreap" panose="02000500000000020004" pitchFamily="2" charset="0"/>
+                <a:ea typeface="Canva Sans"/>
+                <a:cs typeface="!Khmer OS Siemreap" panose="02000500000000020004" pitchFamily="2" charset="0"/>
+                <a:sym typeface="Canva Sans"/>
+              </a:rPr>
+              <a:t>នោះពួកយើងឃើញវានៅក្នុងតារាងនៃ</a:t>
+            </a:r>
+            <a:r>
+              <a:rPr lang="en-US" sz="2000" dirty="0">
+                <a:solidFill>
+                  <a:srgbClr val="000000"/>
+                </a:solidFill>
+                <a:latin typeface="!Khmer OS Siemreap" panose="02000500000000020004" pitchFamily="2" charset="0"/>
+                <a:ea typeface="Canva Sans"/>
+                <a:cs typeface="!Khmer OS Siemreap" panose="02000500000000020004" pitchFamily="2" charset="0"/>
+                <a:sym typeface="Canva Sans"/>
+              </a:rPr>
+              <a:t> tab "Unallocated“</a:t>
+            </a:r>
+            <a:r>
+              <a:rPr lang="km-KH" sz="2000">
+                <a:solidFill>
+                  <a:srgbClr val="000000"/>
+                </a:solidFill>
+                <a:latin typeface="!Khmer OS Siemreap" panose="02000500000000020004" pitchFamily="2" charset="0"/>
+                <a:ea typeface="Canva Sans"/>
+                <a:cs typeface="!Khmer OS Siemreap" panose="02000500000000020004" pitchFamily="2" charset="0"/>
+                <a:sym typeface="Canva Sans"/>
+              </a:rPr>
+              <a:t>។</a:t>
+            </a:r>
+            <a:endParaRPr lang="en-US" sz="2000" dirty="0">
+              <a:solidFill>
+                <a:srgbClr val="000000"/>
+              </a:solidFill>
+              <a:latin typeface="!Khmer OS Siemreap" panose="02000500000000020004" pitchFamily="2" charset="0"/>
+              <a:ea typeface="Canva Sans"/>
+              <a:cs typeface="!Khmer OS Siemreap" panose="02000500000000020004" pitchFamily="2" charset="0"/>
+              <a:sym typeface="Canva Sans"/>
+            </a:endParaRPr>
+          </a:p>
+        </p:txBody>
+      </p:sp>
+      <p:sp>
+        <p:nvSpPr>
+          <p:cNvPr id="4" name="TextBox 3">
+            <a:extLst>
+              <a:ext uri="{FF2B5EF4-FFF2-40B4-BE49-F238E27FC236}">
+                <a16:creationId xmlns:a16="http://schemas.microsoft.com/office/drawing/2014/main" id="{E84D1B0D-859D-A0A3-8C63-97A58CDB21A2}"/>
+              </a:ext>
+            </a:extLst>
+          </p:cNvPr>
+          <p:cNvSpPr txBox="1"/>
+          <p:nvPr/>
+        </p:nvSpPr>
+        <p:spPr>
+          <a:xfrm>
+            <a:off x="1028700" y="3162300"/>
+            <a:ext cx="16230600" cy="2199641"/>
+          </a:xfrm>
+          <a:prstGeom prst="rect">
+            <a:avLst/>
+          </a:prstGeom>
+          <a:noFill/>
+        </p:spPr>
+        <p:txBody>
+          <a:bodyPr wrap="square">
+            <a:spAutoFit/>
+          </a:bodyPr>
+          <a:lstStyle/>
+          <a:p>
+            <a:pPr algn="l">
+              <a:lnSpc>
+                <a:spcPts val="5599"/>
+              </a:lnSpc>
+              <a:spcBef>
+                <a:spcPct val="0"/>
+              </a:spcBef>
+            </a:pPr>
+            <a:r>
+              <a:rPr lang="en-US" sz="2000" b="1" dirty="0">
+                <a:solidFill>
+                  <a:srgbClr val="000000"/>
+                </a:solidFill>
+                <a:latin typeface="!Khmer OS Siemreap" panose="02000500000000020004" pitchFamily="2" charset="0"/>
+                <a:ea typeface="Canva Sans Bold"/>
+                <a:cs typeface="!Khmer OS Siemreap" panose="02000500000000020004" pitchFamily="2" charset="0"/>
+                <a:sym typeface="Canva Sans Bold"/>
+              </a:rPr>
+              <a:t>Confirm Order Reserve</a:t>
+            </a:r>
+          </a:p>
+          <a:p>
+            <a:pPr marL="863596" lvl="1" indent="-431798" algn="l">
+              <a:lnSpc>
+                <a:spcPts val="5599"/>
+              </a:lnSpc>
+              <a:buFont typeface="Arial"/>
+              <a:buChar char="•"/>
+            </a:pPr>
+            <a:r>
+              <a:rPr lang="en-US" sz="2000" dirty="0">
+                <a:solidFill>
+                  <a:srgbClr val="000000"/>
+                </a:solidFill>
+                <a:latin typeface="!Khmer OS Siemreap" panose="02000500000000020004" pitchFamily="2" charset="0"/>
+                <a:ea typeface="Canva Sans"/>
+                <a:cs typeface="!Khmer OS Siemreap" panose="02000500000000020004" pitchFamily="2" charset="0"/>
+                <a:sym typeface="Canva Sans"/>
+              </a:rPr>
+              <a:t>If it is allocated, we see it in a table of tab "Allocated".</a:t>
+            </a:r>
+          </a:p>
+          <a:p>
+            <a:pPr marL="863596" lvl="1" indent="-431798" algn="l">
+              <a:lnSpc>
+                <a:spcPts val="5599"/>
+              </a:lnSpc>
+              <a:buFont typeface="Arial"/>
+              <a:buChar char="•"/>
+            </a:pPr>
+            <a:r>
+              <a:rPr lang="en-US" sz="2000" dirty="0">
+                <a:solidFill>
+                  <a:srgbClr val="000000"/>
+                </a:solidFill>
+                <a:latin typeface="!Khmer OS Siemreap" panose="02000500000000020004" pitchFamily="2" charset="0"/>
+                <a:ea typeface="Canva Sans"/>
+                <a:cs typeface="!Khmer OS Siemreap" panose="02000500000000020004" pitchFamily="2" charset="0"/>
                 <a:sym typeface="Canva Sans"/>
               </a:rPr>
               <a:t>If it is unallocated, we see it in a table of tab "Unallocated".</a:t>
@@ -3407,7 +3634,7 @@
 </file>
 
 <file path=ppt/slides/slide12.xml><?xml version="1.0" encoding="utf-8"?>
-<p:sld xmlns:p="http://schemas.openxmlformats.org/presentationml/2006/main" xmlns:a="http://schemas.openxmlformats.org/drawingml/2006/main" xmlns:r="http://schemas.openxmlformats.org/officeDocument/2006/relationships">
+<p:sld xmlns:a="http://schemas.openxmlformats.org/drawingml/2006/main" xmlns:r="http://schemas.openxmlformats.org/officeDocument/2006/relationships" xmlns:p="http://schemas.openxmlformats.org/presentationml/2006/main">
   <p:cSld>
     <p:spTree>
       <p:nvGrpSpPr>
@@ -3425,12 +3652,12 @@
       </p:grpSpPr>
       <p:sp>
         <p:nvSpPr>
-          <p:cNvPr name="Freeform 2" id="2"/>
+          <p:cNvPr id="2" name="Freeform 2"/>
           <p:cNvSpPr/>
           <p:nvPr/>
         </p:nvSpPr>
         <p:spPr>
-          <a:xfrm flipH="false" flipV="false" rot="0">
+          <a:xfrm>
             <a:off x="0" y="0"/>
             <a:ext cx="18288000" cy="10287000"/>
           </a:xfrm>
@@ -3439,9 +3666,9 @@
             <a:gdLst/>
             <a:ahLst/>
             <a:cxnLst/>
-            <a:rect r="r" b="b" t="t" l="l"/>
+            <a:rect l="l" t="t" r="r" b="b"/>
             <a:pathLst>
-              <a:path h="10287000" w="18288000">
+              <a:path w="18288000" h="10287000">
                 <a:moveTo>
                   <a:pt x="0" y="0"/>
                 </a:moveTo>
@@ -3464,28 +3691,35 @@
           <a:blipFill>
             <a:blip r:embed="rId2"/>
             <a:stretch>
-              <a:fillRect l="-217" t="0" r="-217" b="0"/>
+              <a:fillRect l="-217" r="-217"/>
             </a:stretch>
           </a:blipFill>
         </p:spPr>
-      </p:sp>
-      <p:sp>
-        <p:nvSpPr>
-          <p:cNvPr name="TextBox 3" id="3"/>
-          <p:cNvSpPr txBox="true"/>
+        <p:txBody>
+          <a:bodyPr/>
+          <a:lstStyle/>
+          <a:p>
+            <a:endParaRPr lang="en-US"/>
+          </a:p>
+        </p:txBody>
+      </p:sp>
+      <p:sp>
+        <p:nvSpPr>
+          <p:cNvPr id="3" name="TextBox 3"/>
+          <p:cNvSpPr txBox="1"/>
           <p:nvPr/>
         </p:nvSpPr>
         <p:spPr>
-          <a:xfrm rot="0">
+          <a:xfrm>
             <a:off x="1028700" y="4051237"/>
-            <a:ext cx="16230600" cy="1965451"/>
+            <a:ext cx="16230600" cy="2077492"/>
           </a:xfrm>
           <a:prstGeom prst="rect">
             <a:avLst/>
           </a:prstGeom>
         </p:spPr>
         <p:txBody>
-          <a:bodyPr anchor="t" rtlCol="false" tIns="0" lIns="0" bIns="0" rIns="0">
+          <a:bodyPr lIns="0" tIns="0" rIns="0" bIns="0" rtlCol="0" anchor="t">
             <a:spAutoFit/>
           </a:bodyPr>
           <a:lstStyle/>
@@ -3499,13 +3733,25 @@
               </a:spcBef>
             </a:pPr>
             <a:r>
-              <a:rPr lang="en-US" sz="11558">
+              <a:rPr lang="km-KH" sz="11558" dirty="0">
                 <a:solidFill>
                   <a:srgbClr val="FFFFFF"/>
                 </a:solidFill>
-                <a:latin typeface="Canva Sans"/>
-                <a:ea typeface="Canva Sans"/>
-                <a:cs typeface="Canva Sans"/>
+                <a:latin typeface="!Khmer OS Siemreap" panose="02000500000000020004" pitchFamily="2" charset="0"/>
+                <a:ea typeface="Canva Sans"/>
+                <a:cs typeface="!Khmer OS Siemreap" panose="02000500000000020004" pitchFamily="2" charset="0"/>
+                <a:sym typeface="Canva Sans"/>
+              </a:rPr>
+              <a:t>អរគុណ! </a:t>
+            </a:r>
+            <a:r>
+              <a:rPr lang="en-US" sz="11558" dirty="0">
+                <a:solidFill>
+                  <a:srgbClr val="FFFFFF"/>
+                </a:solidFill>
+                <a:latin typeface="!Khmer OS Siemreap" panose="02000500000000020004" pitchFamily="2" charset="0"/>
+                <a:ea typeface="Canva Sans"/>
+                <a:cs typeface="!Khmer OS Siemreap" panose="02000500000000020004" pitchFamily="2" charset="0"/>
                 <a:sym typeface="Canva Sans"/>
               </a:rPr>
               <a:t>Thank You!</a:t>
@@ -3522,7 +3768,7 @@
 </file>
 
 <file path=ppt/slides/slide2.xml><?xml version="1.0" encoding="utf-8"?>
-<p:sld xmlns:p="http://schemas.openxmlformats.org/presentationml/2006/main" xmlns:a="http://schemas.openxmlformats.org/drawingml/2006/main">
+<p:sld xmlns:a="http://schemas.openxmlformats.org/drawingml/2006/main" xmlns:r="http://schemas.openxmlformats.org/officeDocument/2006/relationships" xmlns:p="http://schemas.openxmlformats.org/presentationml/2006/main">
   <p:cSld>
     <p:spTree>
       <p:nvGrpSpPr>
@@ -3540,21 +3786,21 @@
       </p:grpSpPr>
       <p:sp>
         <p:nvSpPr>
-          <p:cNvPr name="TextBox 2" id="2"/>
-          <p:cNvSpPr txBox="true"/>
+          <p:cNvPr id="2" name="TextBox 2"/>
+          <p:cNvSpPr txBox="1"/>
           <p:nvPr/>
         </p:nvSpPr>
         <p:spPr>
-          <a:xfrm rot="0">
+          <a:xfrm>
             <a:off x="1028700" y="952500"/>
-            <a:ext cx="16230600" cy="5613401"/>
+            <a:ext cx="16230600" cy="2785378"/>
           </a:xfrm>
           <a:prstGeom prst="rect">
             <a:avLst/>
           </a:prstGeom>
         </p:spPr>
         <p:txBody>
-          <a:bodyPr anchor="t" rtlCol="false" tIns="0" lIns="0" bIns="0" rIns="0">
+          <a:bodyPr wrap="square" lIns="0" tIns="0" rIns="0" bIns="0" rtlCol="0" anchor="t">
             <a:spAutoFit/>
           </a:bodyPr>
           <a:lstStyle/>
@@ -3568,13 +3814,13 @@
               </a:spcBef>
             </a:pPr>
             <a:r>
-              <a:rPr lang="en-US" b="true" sz="3999">
-                <a:solidFill>
-                  <a:srgbClr val="000000"/>
-                </a:solidFill>
-                <a:latin typeface="Canva Sans Bold"/>
+              <a:rPr lang="en-US" sz="2000" b="1" dirty="0">
+                <a:solidFill>
+                  <a:srgbClr val="000000"/>
+                </a:solidFill>
+                <a:latin typeface="!Khmer OS Siemreap" panose="02000500000000020004" pitchFamily="2" charset="0"/>
                 <a:ea typeface="Canva Sans Bold"/>
-                <a:cs typeface="Canva Sans Bold"/>
+                <a:cs typeface="!Khmer OS Siemreap" panose="02000500000000020004" pitchFamily="2" charset="0"/>
                 <a:sym typeface="Canva Sans Bold"/>
               </a:rPr>
               <a:t>Stock Allocation Overview</a:t>
@@ -3589,6 +3835,381 @@
                 <a:spcPct val="0"/>
               </a:spcBef>
             </a:pPr>
+            <a:r>
+              <a:rPr lang="en-US" sz="2000" dirty="0">
+                <a:solidFill>
+                  <a:srgbClr val="000000"/>
+                </a:solidFill>
+                <a:latin typeface="!Khmer OS Siemreap" panose="02000500000000020004" pitchFamily="2" charset="0"/>
+                <a:ea typeface="Canva Sans"/>
+                <a:cs typeface="!Khmer OS Siemreap" panose="02000500000000020004" pitchFamily="2" charset="0"/>
+                <a:sym typeface="Canva Sans"/>
+              </a:rPr>
+              <a:t>Stock Allocation </a:t>
+            </a:r>
+            <a:r>
+              <a:rPr lang="km-KH" sz="2000" dirty="0">
+                <a:solidFill>
+                  <a:srgbClr val="000000"/>
+                </a:solidFill>
+                <a:latin typeface="!Khmer OS Siemreap" panose="02000500000000020004" pitchFamily="2" charset="0"/>
+                <a:ea typeface="Canva Sans"/>
+                <a:cs typeface="!Khmer OS Siemreap" panose="02000500000000020004" pitchFamily="2" charset="0"/>
+                <a:sym typeface="Canva Sans"/>
+              </a:rPr>
+              <a:t>គឺជាកន្លែងដែលយើងគ្រប់គ្រងទៅលើ </a:t>
+            </a:r>
+            <a:r>
+              <a:rPr lang="en-US" sz="2000" dirty="0">
+                <a:solidFill>
+                  <a:srgbClr val="000000"/>
+                </a:solidFill>
+                <a:latin typeface="!Khmer OS Siemreap" panose="02000500000000020004" pitchFamily="2" charset="0"/>
+                <a:ea typeface="Canva Sans"/>
+                <a:cs typeface="!Khmer OS Siemreap" panose="02000500000000020004" pitchFamily="2" charset="0"/>
+                <a:sym typeface="Canva Sans"/>
+              </a:rPr>
+              <a:t>sales orders </a:t>
+            </a:r>
+            <a:r>
+              <a:rPr lang="km-KH" sz="2000" dirty="0">
+                <a:solidFill>
+                  <a:srgbClr val="000000"/>
+                </a:solidFill>
+                <a:latin typeface="!Khmer OS Siemreap" panose="02000500000000020004" pitchFamily="2" charset="0"/>
+                <a:ea typeface="Canva Sans"/>
+                <a:cs typeface="!Khmer OS Siemreap" panose="02000500000000020004" pitchFamily="2" charset="0"/>
+                <a:sym typeface="Canva Sans"/>
+              </a:rPr>
+              <a:t>ដោយផ្អែកលើ </a:t>
+            </a:r>
+            <a:r>
+              <a:rPr lang="en-US" sz="2000" dirty="0">
+                <a:solidFill>
+                  <a:srgbClr val="000000"/>
+                </a:solidFill>
+                <a:latin typeface="!Khmer OS Siemreap" panose="02000500000000020004" pitchFamily="2" charset="0"/>
+                <a:ea typeface="Canva Sans"/>
+                <a:cs typeface="!Khmer OS Siemreap" panose="02000500000000020004" pitchFamily="2" charset="0"/>
+                <a:sym typeface="Canva Sans"/>
+              </a:rPr>
+              <a:t>stock availability (stock</a:t>
+            </a:r>
+            <a:r>
+              <a:rPr lang="km-KH" sz="2000" dirty="0">
+                <a:solidFill>
+                  <a:srgbClr val="000000"/>
+                </a:solidFill>
+                <a:latin typeface="!Khmer OS Siemreap" panose="02000500000000020004" pitchFamily="2" charset="0"/>
+                <a:ea typeface="Canva Sans"/>
+                <a:cs typeface="!Khmer OS Siemreap" panose="02000500000000020004" pitchFamily="2" charset="0"/>
+                <a:sym typeface="Canva Sans"/>
+              </a:rPr>
+              <a:t> ដែលមិនគ្រប់និងគ្រប់</a:t>
+            </a:r>
+            <a:r>
+              <a:rPr lang="en-US" sz="2000" dirty="0">
+                <a:solidFill>
+                  <a:srgbClr val="000000"/>
+                </a:solidFill>
+                <a:latin typeface="!Khmer OS Siemreap" panose="02000500000000020004" pitchFamily="2" charset="0"/>
+                <a:ea typeface="Canva Sans"/>
+                <a:cs typeface="!Khmer OS Siemreap" panose="02000500000000020004" pitchFamily="2" charset="0"/>
+                <a:sym typeface="Canva Sans"/>
+              </a:rPr>
+              <a:t>)</a:t>
+            </a:r>
+            <a:r>
+              <a:rPr lang="km-KH" sz="2000" dirty="0">
+                <a:solidFill>
+                  <a:srgbClr val="000000"/>
+                </a:solidFill>
+                <a:latin typeface="!Khmer OS Siemreap" panose="02000500000000020004" pitchFamily="2" charset="0"/>
+                <a:ea typeface="Canva Sans"/>
+                <a:cs typeface="!Khmer OS Siemreap" panose="02000500000000020004" pitchFamily="2" charset="0"/>
+                <a:sym typeface="Canva Sans"/>
+              </a:rPr>
+              <a:t>។</a:t>
+            </a:r>
+            <a:endParaRPr lang="en-US" sz="2000" dirty="0">
+              <a:solidFill>
+                <a:srgbClr val="000000"/>
+              </a:solidFill>
+              <a:latin typeface="!Khmer OS Siemreap" panose="02000500000000020004" pitchFamily="2" charset="0"/>
+              <a:ea typeface="Canva Sans"/>
+              <a:cs typeface="!Khmer OS Siemreap" panose="02000500000000020004" pitchFamily="2" charset="0"/>
+              <a:sym typeface="Canva Sans"/>
+            </a:endParaRPr>
+          </a:p>
+          <a:p>
+            <a:pPr marL="863593" lvl="1" indent="-431796" algn="l">
+              <a:lnSpc>
+                <a:spcPts val="5599"/>
+              </a:lnSpc>
+              <a:buFont typeface="Arial"/>
+              <a:buChar char="•"/>
+            </a:pPr>
+            <a:r>
+              <a:rPr lang="en-US" sz="2000" dirty="0">
+                <a:solidFill>
+                  <a:srgbClr val="000000"/>
+                </a:solidFill>
+                <a:latin typeface="!Khmer OS Siemreap" panose="02000500000000020004" pitchFamily="2" charset="0"/>
+                <a:ea typeface="Canva Sans"/>
+                <a:cs typeface="!Khmer OS Siemreap" panose="02000500000000020004" pitchFamily="2" charset="0"/>
+                <a:sym typeface="Canva Sans"/>
+              </a:rPr>
+              <a:t>Tab "Allocated"</a:t>
+            </a:r>
+            <a:r>
+              <a:rPr lang="km-KH" sz="2000" dirty="0">
+                <a:solidFill>
+                  <a:srgbClr val="000000"/>
+                </a:solidFill>
+                <a:latin typeface="!Khmer OS Siemreap" panose="02000500000000020004" pitchFamily="2" charset="0"/>
+                <a:ea typeface="Canva Sans"/>
+                <a:cs typeface="!Khmer OS Siemreap" panose="02000500000000020004" pitchFamily="2" charset="0"/>
+                <a:sym typeface="Canva Sans"/>
+              </a:rPr>
+              <a:t>៖</a:t>
+            </a:r>
+            <a:r>
+              <a:rPr lang="en-US" sz="2000" dirty="0">
+                <a:solidFill>
+                  <a:srgbClr val="000000"/>
+                </a:solidFill>
+                <a:latin typeface="!Khmer OS Siemreap" panose="02000500000000020004" pitchFamily="2" charset="0"/>
+                <a:ea typeface="Canva Sans"/>
+                <a:cs typeface="!Khmer OS Siemreap" panose="02000500000000020004" pitchFamily="2" charset="0"/>
+                <a:sym typeface="Canva Sans"/>
+              </a:rPr>
+              <a:t> </a:t>
+            </a:r>
+            <a:r>
+              <a:rPr lang="km-KH" sz="2000" dirty="0">
+                <a:solidFill>
+                  <a:srgbClr val="000000"/>
+                </a:solidFill>
+                <a:latin typeface="!Khmer OS Siemreap" panose="02000500000000020004" pitchFamily="2" charset="0"/>
+                <a:ea typeface="Canva Sans"/>
+                <a:cs typeface="!Khmer OS Siemreap" panose="02000500000000020004" pitchFamily="2" charset="0"/>
+                <a:sym typeface="Canva Sans"/>
+              </a:rPr>
+              <a:t>បង្ហាញពី</a:t>
+            </a:r>
+            <a:r>
+              <a:rPr lang="en-US" sz="2000" dirty="0">
+                <a:solidFill>
+                  <a:srgbClr val="000000"/>
+                </a:solidFill>
+                <a:latin typeface="!Khmer OS Siemreap" panose="02000500000000020004" pitchFamily="2" charset="0"/>
+                <a:ea typeface="Canva Sans"/>
+                <a:cs typeface="!Khmer OS Siemreap" panose="02000500000000020004" pitchFamily="2" charset="0"/>
+                <a:sym typeface="Canva Sans"/>
+              </a:rPr>
+              <a:t> sales orders </a:t>
+            </a:r>
+            <a:r>
+              <a:rPr lang="km-KH" sz="2000" dirty="0">
+                <a:solidFill>
+                  <a:srgbClr val="000000"/>
+                </a:solidFill>
+                <a:latin typeface="!Khmer OS Siemreap" panose="02000500000000020004" pitchFamily="2" charset="0"/>
+                <a:ea typeface="Canva Sans"/>
+                <a:cs typeface="!Khmer OS Siemreap" panose="02000500000000020004" pitchFamily="2" charset="0"/>
+                <a:sym typeface="Canva Sans"/>
+              </a:rPr>
+              <a:t>ដែលមាន </a:t>
+            </a:r>
+            <a:r>
+              <a:rPr lang="en-US" sz="2000" dirty="0">
+                <a:solidFill>
+                  <a:srgbClr val="000000"/>
+                </a:solidFill>
+                <a:latin typeface="!Khmer OS Siemreap" panose="02000500000000020004" pitchFamily="2" charset="0"/>
+                <a:ea typeface="Canva Sans"/>
+                <a:cs typeface="!Khmer OS Siemreap" panose="02000500000000020004" pitchFamily="2" charset="0"/>
+                <a:sym typeface="Canva Sans"/>
+              </a:rPr>
+              <a:t>stock</a:t>
+            </a:r>
+            <a:r>
+              <a:rPr lang="km-KH" sz="2000" dirty="0">
+                <a:solidFill>
+                  <a:srgbClr val="000000"/>
+                </a:solidFill>
+                <a:latin typeface="!Khmer OS Siemreap" panose="02000500000000020004" pitchFamily="2" charset="0"/>
+                <a:ea typeface="Canva Sans"/>
+                <a:cs typeface="!Khmer OS Siemreap" panose="02000500000000020004" pitchFamily="2" charset="0"/>
+                <a:sym typeface="Canva Sans"/>
+              </a:rPr>
+              <a:t> គ្រប់ចំនួន។</a:t>
+            </a:r>
+            <a:endParaRPr lang="en-US" sz="2000" dirty="0">
+              <a:solidFill>
+                <a:srgbClr val="000000"/>
+              </a:solidFill>
+              <a:latin typeface="!Khmer OS Siemreap" panose="02000500000000020004" pitchFamily="2" charset="0"/>
+              <a:ea typeface="Canva Sans"/>
+              <a:cs typeface="!Khmer OS Siemreap" panose="02000500000000020004" pitchFamily="2" charset="0"/>
+              <a:sym typeface="Canva Sans"/>
+            </a:endParaRPr>
+          </a:p>
+          <a:p>
+            <a:pPr marL="863593" lvl="1" indent="-431796">
+              <a:lnSpc>
+                <a:spcPts val="5599"/>
+              </a:lnSpc>
+              <a:buFont typeface="Arial"/>
+              <a:buChar char="•"/>
+            </a:pPr>
+            <a:r>
+              <a:rPr lang="en-US" sz="2000" dirty="0">
+                <a:solidFill>
+                  <a:srgbClr val="000000"/>
+                </a:solidFill>
+                <a:latin typeface="!Khmer OS Siemreap" panose="02000500000000020004" pitchFamily="2" charset="0"/>
+                <a:ea typeface="Canva Sans"/>
+                <a:cs typeface="!Khmer OS Siemreap" panose="02000500000000020004" pitchFamily="2" charset="0"/>
+                <a:sym typeface="Canva Sans"/>
+              </a:rPr>
+              <a:t>Tab "Unallocated"</a:t>
+            </a:r>
+            <a:r>
+              <a:rPr lang="km-KH" sz="2000" dirty="0">
+                <a:solidFill>
+                  <a:srgbClr val="000000"/>
+                </a:solidFill>
+                <a:latin typeface="!Khmer OS Siemreap" panose="02000500000000020004" pitchFamily="2" charset="0"/>
+                <a:ea typeface="Canva Sans"/>
+                <a:cs typeface="!Khmer OS Siemreap" panose="02000500000000020004" pitchFamily="2" charset="0"/>
+                <a:sym typeface="Canva Sans"/>
+              </a:rPr>
+              <a:t>៖</a:t>
+            </a:r>
+            <a:r>
+              <a:rPr lang="en-US" sz="2000" dirty="0">
+                <a:solidFill>
+                  <a:srgbClr val="000000"/>
+                </a:solidFill>
+                <a:latin typeface="!Khmer OS Siemreap" panose="02000500000000020004" pitchFamily="2" charset="0"/>
+                <a:ea typeface="Canva Sans"/>
+                <a:cs typeface="!Khmer OS Siemreap" panose="02000500000000020004" pitchFamily="2" charset="0"/>
+                <a:sym typeface="Canva Sans"/>
+              </a:rPr>
+              <a:t> </a:t>
+            </a:r>
+            <a:r>
+              <a:rPr lang="km-KH" sz="2000" dirty="0">
+                <a:solidFill>
+                  <a:srgbClr val="000000"/>
+                </a:solidFill>
+                <a:latin typeface="!Khmer OS Siemreap" panose="02000500000000020004" pitchFamily="2" charset="0"/>
+                <a:ea typeface="Canva Sans"/>
+                <a:cs typeface="!Khmer OS Siemreap" panose="02000500000000020004" pitchFamily="2" charset="0"/>
+                <a:sym typeface="Canva Sans"/>
+              </a:rPr>
+              <a:t>បង្ហាញពី</a:t>
+            </a:r>
+            <a:r>
+              <a:rPr lang="en-US" sz="2000" dirty="0">
+                <a:solidFill>
+                  <a:srgbClr val="000000"/>
+                </a:solidFill>
+                <a:latin typeface="!Khmer OS Siemreap" panose="02000500000000020004" pitchFamily="2" charset="0"/>
+                <a:ea typeface="Canva Sans"/>
+                <a:cs typeface="!Khmer OS Siemreap" panose="02000500000000020004" pitchFamily="2" charset="0"/>
+                <a:sym typeface="Canva Sans"/>
+              </a:rPr>
+              <a:t> sales orders </a:t>
+            </a:r>
+            <a:r>
+              <a:rPr lang="km-KH" sz="2000" dirty="0">
+                <a:solidFill>
+                  <a:srgbClr val="000000"/>
+                </a:solidFill>
+                <a:latin typeface="!Khmer OS Siemreap" panose="02000500000000020004" pitchFamily="2" charset="0"/>
+                <a:ea typeface="Canva Sans"/>
+                <a:cs typeface="!Khmer OS Siemreap" panose="02000500000000020004" pitchFamily="2" charset="0"/>
+                <a:sym typeface="Canva Sans"/>
+              </a:rPr>
+              <a:t>ដែលមាន </a:t>
+            </a:r>
+            <a:r>
+              <a:rPr lang="en-US" sz="2000" dirty="0">
+                <a:solidFill>
+                  <a:srgbClr val="000000"/>
+                </a:solidFill>
+                <a:latin typeface="!Khmer OS Siemreap" panose="02000500000000020004" pitchFamily="2" charset="0"/>
+                <a:ea typeface="Canva Sans"/>
+                <a:cs typeface="!Khmer OS Siemreap" panose="02000500000000020004" pitchFamily="2" charset="0"/>
+                <a:sym typeface="Canva Sans"/>
+              </a:rPr>
+              <a:t>stock</a:t>
+            </a:r>
+            <a:r>
+              <a:rPr lang="km-KH" sz="2000" dirty="0">
+                <a:solidFill>
+                  <a:srgbClr val="000000"/>
+                </a:solidFill>
+                <a:latin typeface="!Khmer OS Siemreap" panose="02000500000000020004" pitchFamily="2" charset="0"/>
+                <a:ea typeface="Canva Sans"/>
+                <a:cs typeface="!Khmer OS Siemreap" panose="02000500000000020004" pitchFamily="2" charset="0"/>
+                <a:sym typeface="Canva Sans"/>
+              </a:rPr>
+              <a:t> មិនគ្រប់ចំនួន។</a:t>
+            </a:r>
+          </a:p>
+        </p:txBody>
+      </p:sp>
+      <p:sp>
+        <p:nvSpPr>
+          <p:cNvPr id="6" name="TextBox 5">
+            <a:extLst>
+              <a:ext uri="{FF2B5EF4-FFF2-40B4-BE49-F238E27FC236}">
+                <a16:creationId xmlns:a16="http://schemas.microsoft.com/office/drawing/2014/main" id="{878D089E-53C6-AA8C-54AB-D2348BA69AA9}"/>
+              </a:ext>
+            </a:extLst>
+          </p:cNvPr>
+          <p:cNvSpPr txBox="1"/>
+          <p:nvPr/>
+        </p:nvSpPr>
+        <p:spPr>
+          <a:xfrm>
+            <a:off x="1028700" y="3737878"/>
+            <a:ext cx="16230600" cy="2877711"/>
+          </a:xfrm>
+          <a:prstGeom prst="rect">
+            <a:avLst/>
+          </a:prstGeom>
+          <a:noFill/>
+        </p:spPr>
+        <p:txBody>
+          <a:bodyPr wrap="square">
+            <a:spAutoFit/>
+          </a:bodyPr>
+          <a:lstStyle/>
+          <a:p>
+            <a:pPr>
+              <a:lnSpc>
+                <a:spcPts val="5599"/>
+              </a:lnSpc>
+              <a:spcBef>
+                <a:spcPct val="0"/>
+              </a:spcBef>
+            </a:pPr>
+            <a:r>
+              <a:rPr lang="en-US" sz="2000" b="1" dirty="0">
+                <a:solidFill>
+                  <a:srgbClr val="000000"/>
+                </a:solidFill>
+                <a:latin typeface="!Khmer OS Siemreap" panose="02000500000000020004" pitchFamily="2" charset="0"/>
+                <a:ea typeface="Canva Sans Bold"/>
+                <a:cs typeface="!Khmer OS Siemreap" panose="02000500000000020004" pitchFamily="2" charset="0"/>
+                <a:sym typeface="Canva Sans Bold"/>
+              </a:rPr>
+              <a:t>Stock Allocation Overview</a:t>
+            </a:r>
           </a:p>
           <a:p>
             <a:pPr algn="l">
@@ -3600,30 +4221,20 @@
               </a:spcBef>
             </a:pPr>
             <a:r>
-              <a:rPr lang="en-US" sz="3999">
-                <a:solidFill>
-                  <a:srgbClr val="000000"/>
-                </a:solidFill>
-                <a:latin typeface="Canva Sans"/>
-                <a:ea typeface="Canva Sans"/>
-                <a:cs typeface="Canva Sans"/>
+              <a:rPr lang="en-US" sz="2000" dirty="0">
+                <a:solidFill>
+                  <a:srgbClr val="000000"/>
+                </a:solidFill>
+                <a:latin typeface="!Khmer OS Siemreap" panose="02000500000000020004" pitchFamily="2" charset="0"/>
+                <a:ea typeface="Canva Sans"/>
+                <a:cs typeface="!Khmer OS Siemreap" panose="02000500000000020004" pitchFamily="2" charset="0"/>
                 <a:sym typeface="Canva Sans"/>
               </a:rPr>
               <a:t>Stock Allocation is where we manage sales orders based on stock availability (shortage vs. sufficient stock).</a:t>
             </a:r>
           </a:p>
           <a:p>
-            <a:pPr algn="l">
-              <a:lnSpc>
-                <a:spcPts val="5599"/>
-              </a:lnSpc>
-              <a:spcBef>
-                <a:spcPct val="0"/>
-              </a:spcBef>
-            </a:pPr>
-          </a:p>
-          <a:p>
-            <a:pPr algn="l" marL="863593" indent="-431796" lvl="1">
+            <a:pPr marL="863593" lvl="1" indent="-431796" algn="l">
               <a:lnSpc>
                 <a:spcPts val="5599"/>
               </a:lnSpc>
@@ -3631,20 +4242,20 @@
               <a:buChar char="•"/>
             </a:pPr>
             <a:r>
-              <a:rPr lang="en-US" sz="3999">
-                <a:solidFill>
-                  <a:srgbClr val="000000"/>
-                </a:solidFill>
-                <a:latin typeface="Canva Sans"/>
-                <a:ea typeface="Canva Sans"/>
-                <a:cs typeface="Canva Sans"/>
+              <a:rPr lang="en-US" sz="2000" dirty="0">
+                <a:solidFill>
+                  <a:srgbClr val="000000"/>
+                </a:solidFill>
+                <a:latin typeface="!Khmer OS Siemreap" panose="02000500000000020004" pitchFamily="2" charset="0"/>
+                <a:ea typeface="Canva Sans"/>
+                <a:cs typeface="!Khmer OS Siemreap" panose="02000500000000020004" pitchFamily="2" charset="0"/>
                 <a:sym typeface="Canva Sans"/>
               </a:rPr>
               <a:t>Tab "Allocated": Shows sales orders that have sufficient stock.</a:t>
             </a:r>
           </a:p>
           <a:p>
-            <a:pPr algn="l" marL="863593" indent="-431796" lvl="1">
+            <a:pPr marL="863593" lvl="1" indent="-431796" algn="l">
               <a:lnSpc>
                 <a:spcPts val="5599"/>
               </a:lnSpc>
@@ -3652,13 +4263,13 @@
               <a:buChar char="•"/>
             </a:pPr>
             <a:r>
-              <a:rPr lang="en-US" sz="3999">
-                <a:solidFill>
-                  <a:srgbClr val="000000"/>
-                </a:solidFill>
-                <a:latin typeface="Canva Sans"/>
-                <a:ea typeface="Canva Sans"/>
-                <a:cs typeface="Canva Sans"/>
+              <a:rPr lang="en-US" sz="2000" dirty="0">
+                <a:solidFill>
+                  <a:srgbClr val="000000"/>
+                </a:solidFill>
+                <a:latin typeface="!Khmer OS Siemreap" panose="02000500000000020004" pitchFamily="2" charset="0"/>
+                <a:ea typeface="Canva Sans"/>
+                <a:cs typeface="!Khmer OS Siemreap" panose="02000500000000020004" pitchFamily="2" charset="0"/>
                 <a:sym typeface="Canva Sans"/>
               </a:rPr>
               <a:t>Tab "Unallocated": Shows sales orders that have sufficient stock.</a:t>
@@ -3675,7 +4286,7 @@
 </file>
 
 <file path=ppt/slides/slide3.xml><?xml version="1.0" encoding="utf-8"?>
-<p:sld xmlns:p="http://schemas.openxmlformats.org/presentationml/2006/main" xmlns:a="http://schemas.openxmlformats.org/drawingml/2006/main">
+<p:sld xmlns:a="http://schemas.openxmlformats.org/drawingml/2006/main" xmlns:r="http://schemas.openxmlformats.org/officeDocument/2006/relationships" xmlns:p="http://schemas.openxmlformats.org/presentationml/2006/main">
   <p:cSld>
     <p:spTree>
       <p:nvGrpSpPr>
@@ -3693,21 +4304,21 @@
       </p:grpSpPr>
       <p:sp>
         <p:nvSpPr>
-          <p:cNvPr name="TextBox 2" id="2"/>
-          <p:cNvSpPr txBox="true"/>
+          <p:cNvPr id="2" name="TextBox 2"/>
+          <p:cNvSpPr txBox="1"/>
           <p:nvPr/>
         </p:nvSpPr>
         <p:spPr>
-          <a:xfrm rot="0">
+          <a:xfrm>
             <a:off x="1028700" y="942975"/>
-            <a:ext cx="16230600" cy="5622925"/>
+            <a:ext cx="16230600" cy="4221669"/>
           </a:xfrm>
           <a:prstGeom prst="rect">
             <a:avLst/>
           </a:prstGeom>
         </p:spPr>
         <p:txBody>
-          <a:bodyPr anchor="t" rtlCol="false" tIns="0" lIns="0" bIns="0" rIns="0">
+          <a:bodyPr lIns="0" tIns="0" rIns="0" bIns="0" rtlCol="0" anchor="t">
             <a:spAutoFit/>
           </a:bodyPr>
           <a:lstStyle/>
@@ -3721,13 +4332,13 @@
               </a:spcBef>
             </a:pPr>
             <a:r>
-              <a:rPr lang="en-US" b="true" sz="4000">
-                <a:solidFill>
-                  <a:srgbClr val="000000"/>
-                </a:solidFill>
-                <a:latin typeface="Canva Sans Bold"/>
+              <a:rPr lang="en-US" sz="2000" b="1" dirty="0">
+                <a:solidFill>
+                  <a:srgbClr val="000000"/>
+                </a:solidFill>
+                <a:latin typeface="!Khmer OS Siemreap" panose="02000500000000020004" pitchFamily="2" charset="0"/>
                 <a:ea typeface="Canva Sans Bold"/>
-                <a:cs typeface="Canva Sans Bold"/>
+                <a:cs typeface="!Khmer OS Siemreap" panose="02000500000000020004" pitchFamily="2" charset="0"/>
                 <a:sym typeface="Canva Sans Bold"/>
               </a:rPr>
               <a:t>Editing Sale Order</a:t>
@@ -3743,16 +4354,434 @@
               </a:spcBef>
             </a:pPr>
             <a:r>
-              <a:rPr lang="en-US" sz="4000">
-                <a:solidFill>
-                  <a:srgbClr val="000000"/>
-                </a:solidFill>
-                <a:latin typeface="Canva Sans"/>
-                <a:ea typeface="Canva Sans"/>
-                <a:cs typeface="Canva Sans"/>
-                <a:sym typeface="Canva Sans"/>
-              </a:rPr>
-              <a:t>To edit a sales order, it must be set tounallocatedfirst. Afterwards, the sales order will appear under Option Order Editing.</a:t>
+              <a:rPr lang="km-KH" sz="2000" dirty="0">
+                <a:solidFill>
+                  <a:srgbClr val="000000"/>
+                </a:solidFill>
+                <a:latin typeface="!Khmer OS Siemreap" panose="02000500000000020004" pitchFamily="2" charset="0"/>
+                <a:ea typeface="Canva Sans"/>
+                <a:cs typeface="!Khmer OS Siemreap" panose="02000500000000020004" pitchFamily="2" charset="0"/>
+                <a:sym typeface="Canva Sans"/>
+              </a:rPr>
+              <a:t>ដើម្បីកែ </a:t>
+            </a:r>
+            <a:r>
+              <a:rPr lang="en-US" sz="2000" dirty="0">
+                <a:solidFill>
+                  <a:srgbClr val="000000"/>
+                </a:solidFill>
+                <a:latin typeface="!Khmer OS Siemreap" panose="02000500000000020004" pitchFamily="2" charset="0"/>
+                <a:ea typeface="Canva Sans"/>
+                <a:cs typeface="!Khmer OS Siemreap" panose="02000500000000020004" pitchFamily="2" charset="0"/>
+                <a:sym typeface="Canva Sans"/>
+              </a:rPr>
+              <a:t>sales order</a:t>
+            </a:r>
+            <a:r>
+              <a:rPr lang="km-KH" sz="2000" dirty="0">
+                <a:solidFill>
+                  <a:srgbClr val="000000"/>
+                </a:solidFill>
+                <a:latin typeface="!Khmer OS Siemreap" panose="02000500000000020004" pitchFamily="2" charset="0"/>
+                <a:ea typeface="Canva Sans"/>
+                <a:cs typeface="!Khmer OS Siemreap" panose="02000500000000020004" pitchFamily="2" charset="0"/>
+                <a:sym typeface="Canva Sans"/>
+              </a:rPr>
+              <a:t> បាន វាត្រូវតែជា </a:t>
+            </a:r>
+            <a:r>
+              <a:rPr lang="en-US" sz="2000" dirty="0">
+                <a:solidFill>
+                  <a:srgbClr val="000000"/>
+                </a:solidFill>
+                <a:latin typeface="!Khmer OS Siemreap" panose="02000500000000020004" pitchFamily="2" charset="0"/>
+                <a:ea typeface="Canva Sans"/>
+                <a:cs typeface="!Khmer OS Siemreap" panose="02000500000000020004" pitchFamily="2" charset="0"/>
+                <a:sym typeface="Canva Sans"/>
+              </a:rPr>
+              <a:t>unallocated</a:t>
+            </a:r>
+            <a:r>
+              <a:rPr lang="km-KH" sz="2000" dirty="0">
+                <a:solidFill>
+                  <a:srgbClr val="000000"/>
+                </a:solidFill>
+                <a:latin typeface="!Khmer OS Siemreap" panose="02000500000000020004" pitchFamily="2" charset="0"/>
+                <a:ea typeface="Canva Sans"/>
+                <a:cs typeface="!Khmer OS Siemreap" panose="02000500000000020004" pitchFamily="2" charset="0"/>
+                <a:sym typeface="Canva Sans"/>
+              </a:rPr>
+              <a:t> ជាមុនសិន។ បន្ទាប់មក </a:t>
+            </a:r>
+            <a:r>
+              <a:rPr lang="en-US" sz="2000" dirty="0">
+                <a:solidFill>
+                  <a:srgbClr val="000000"/>
+                </a:solidFill>
+                <a:latin typeface="!Khmer OS Siemreap" panose="02000500000000020004" pitchFamily="2" charset="0"/>
+                <a:ea typeface="Canva Sans"/>
+                <a:cs typeface="!Khmer OS Siemreap" panose="02000500000000020004" pitchFamily="2" charset="0"/>
+                <a:sym typeface="Canva Sans"/>
+              </a:rPr>
+              <a:t>sales order </a:t>
+            </a:r>
+            <a:r>
+              <a:rPr lang="km-KH" sz="2000" dirty="0">
+                <a:solidFill>
+                  <a:srgbClr val="000000"/>
+                </a:solidFill>
+                <a:latin typeface="!Khmer OS Siemreap" panose="02000500000000020004" pitchFamily="2" charset="0"/>
+                <a:ea typeface="Canva Sans"/>
+                <a:cs typeface="!Khmer OS Siemreap" panose="02000500000000020004" pitchFamily="2" charset="0"/>
+                <a:sym typeface="Canva Sans"/>
+              </a:rPr>
+              <a:t>នឹងចេញមកនៅក្រោម </a:t>
+            </a:r>
+            <a:r>
+              <a:rPr lang="en-US" sz="2000" dirty="0">
+                <a:solidFill>
+                  <a:srgbClr val="000000"/>
+                </a:solidFill>
+                <a:latin typeface="!Khmer OS Siemreap" panose="02000500000000020004" pitchFamily="2" charset="0"/>
+                <a:ea typeface="Canva Sans"/>
+                <a:cs typeface="!Khmer OS Siemreap" panose="02000500000000020004" pitchFamily="2" charset="0"/>
+                <a:sym typeface="Canva Sans"/>
+              </a:rPr>
+              <a:t>Option Order Editing</a:t>
+            </a:r>
+            <a:r>
+              <a:rPr lang="km-KH" sz="2000" dirty="0">
+                <a:solidFill>
+                  <a:srgbClr val="000000"/>
+                </a:solidFill>
+                <a:latin typeface="!Khmer OS Siemreap" panose="02000500000000020004" pitchFamily="2" charset="0"/>
+                <a:ea typeface="Canva Sans"/>
+                <a:cs typeface="!Khmer OS Siemreap" panose="02000500000000020004" pitchFamily="2" charset="0"/>
+                <a:sym typeface="Canva Sans"/>
+              </a:rPr>
+              <a:t>។</a:t>
+            </a:r>
+            <a:endParaRPr lang="en-US" sz="2000" dirty="0">
+              <a:solidFill>
+                <a:srgbClr val="000000"/>
+              </a:solidFill>
+              <a:latin typeface="!Khmer OS Siemreap" panose="02000500000000020004" pitchFamily="2" charset="0"/>
+              <a:ea typeface="Canva Sans"/>
+              <a:cs typeface="!Khmer OS Siemreap" panose="02000500000000020004" pitchFamily="2" charset="0"/>
+              <a:sym typeface="Canva Sans"/>
+            </a:endParaRPr>
+          </a:p>
+          <a:p>
+            <a:pPr>
+              <a:lnSpc>
+                <a:spcPts val="5600"/>
+              </a:lnSpc>
+              <a:spcBef>
+                <a:spcPct val="0"/>
+              </a:spcBef>
+            </a:pPr>
+            <a:r>
+              <a:rPr lang="km-KH" sz="2000" dirty="0">
+                <a:solidFill>
+                  <a:srgbClr val="000000"/>
+                </a:solidFill>
+                <a:latin typeface="!Khmer OS Siemreap" panose="02000500000000020004" pitchFamily="2" charset="0"/>
+                <a:ea typeface="Canva Sans"/>
+                <a:cs typeface="!Khmer OS Siemreap" panose="02000500000000020004" pitchFamily="2" charset="0"/>
+                <a:sym typeface="Canva Sans"/>
+              </a:rPr>
+              <a:t>ជំហាន</a:t>
+            </a:r>
+            <a:r>
+              <a:rPr lang="en-US" sz="2000" dirty="0">
+                <a:solidFill>
+                  <a:srgbClr val="000000"/>
+                </a:solidFill>
+                <a:latin typeface="!Khmer OS Siemreap" panose="02000500000000020004" pitchFamily="2" charset="0"/>
+                <a:ea typeface="Canva Sans"/>
+                <a:cs typeface="!Khmer OS Siemreap" panose="02000500000000020004" pitchFamily="2" charset="0"/>
+                <a:sym typeface="Canva Sans"/>
+              </a:rPr>
+              <a:t> edit </a:t>
+            </a:r>
+            <a:r>
+              <a:rPr lang="km-KH" sz="2000" dirty="0">
+                <a:solidFill>
+                  <a:srgbClr val="000000"/>
+                </a:solidFill>
+                <a:latin typeface="!Khmer OS Siemreap" panose="02000500000000020004" pitchFamily="2" charset="0"/>
+                <a:ea typeface="Canva Sans"/>
+                <a:cs typeface="!Khmer OS Siemreap" panose="02000500000000020004" pitchFamily="2" charset="0"/>
+                <a:sym typeface="Canva Sans"/>
+              </a:rPr>
+              <a:t>លើ</a:t>
+            </a:r>
+            <a:r>
+              <a:rPr lang="en-US" sz="2000" dirty="0">
+                <a:solidFill>
+                  <a:srgbClr val="000000"/>
+                </a:solidFill>
+                <a:latin typeface="!Khmer OS Siemreap" panose="02000500000000020004" pitchFamily="2" charset="0"/>
+                <a:ea typeface="Canva Sans"/>
+                <a:cs typeface="!Khmer OS Siemreap" panose="02000500000000020004" pitchFamily="2" charset="0"/>
+                <a:sym typeface="Canva Sans"/>
+              </a:rPr>
+              <a:t> sales order</a:t>
+            </a:r>
+            <a:r>
+              <a:rPr lang="km-KH" sz="2000" dirty="0">
+                <a:solidFill>
+                  <a:srgbClr val="000000"/>
+                </a:solidFill>
+                <a:latin typeface="!Khmer OS Siemreap" panose="02000500000000020004" pitchFamily="2" charset="0"/>
+                <a:ea typeface="Canva Sans"/>
+                <a:cs typeface="!Khmer OS Siemreap" panose="02000500000000020004" pitchFamily="2" charset="0"/>
+                <a:sym typeface="Canva Sans"/>
+              </a:rPr>
+              <a:t>៖</a:t>
+            </a:r>
+            <a:endParaRPr lang="en-US" sz="2000" dirty="0">
+              <a:solidFill>
+                <a:srgbClr val="000000"/>
+              </a:solidFill>
+              <a:latin typeface="!Khmer OS Siemreap" panose="02000500000000020004" pitchFamily="2" charset="0"/>
+              <a:ea typeface="Canva Sans"/>
+              <a:cs typeface="!Khmer OS Siemreap" panose="02000500000000020004" pitchFamily="2" charset="0"/>
+              <a:sym typeface="Canva Sans"/>
+            </a:endParaRPr>
+          </a:p>
+          <a:p>
+            <a:pPr marL="863601" lvl="1" indent="-431801">
+              <a:lnSpc>
+                <a:spcPts val="5600"/>
+              </a:lnSpc>
+              <a:buAutoNum type="arabicPeriod"/>
+            </a:pPr>
+            <a:r>
+              <a:rPr lang="km-KH" sz="2000" dirty="0">
+                <a:solidFill>
+                  <a:srgbClr val="000000"/>
+                </a:solidFill>
+                <a:latin typeface="!Khmer OS Siemreap" panose="02000500000000020004" pitchFamily="2" charset="0"/>
+                <a:ea typeface="Canva Sans"/>
+                <a:cs typeface="!Khmer OS Siemreap" panose="02000500000000020004" pitchFamily="2" charset="0"/>
+                <a:sym typeface="Canva Sans"/>
+              </a:rPr>
+              <a:t>ចូលទៅកាន់ </a:t>
+            </a:r>
+            <a:r>
+              <a:rPr lang="en-US" sz="2000" dirty="0">
+                <a:solidFill>
+                  <a:srgbClr val="000000"/>
+                </a:solidFill>
+                <a:latin typeface="!Khmer OS Siemreap" panose="02000500000000020004" pitchFamily="2" charset="0"/>
+                <a:ea typeface="Canva Sans"/>
+                <a:cs typeface="!Khmer OS Siemreap" panose="02000500000000020004" pitchFamily="2" charset="0"/>
+                <a:sym typeface="Canva Sans"/>
+              </a:rPr>
+              <a:t>Stock Allocation</a:t>
+            </a:r>
+            <a:r>
+              <a:rPr lang="km-KH" sz="2000" dirty="0">
+                <a:solidFill>
+                  <a:srgbClr val="000000"/>
+                </a:solidFill>
+                <a:latin typeface="!Khmer OS Siemreap" panose="02000500000000020004" pitchFamily="2" charset="0"/>
+                <a:ea typeface="Canva Sans"/>
+                <a:cs typeface="!Khmer OS Siemreap" panose="02000500000000020004" pitchFamily="2" charset="0"/>
+                <a:sym typeface="Canva Sans"/>
+              </a:rPr>
+              <a:t>។</a:t>
+            </a:r>
+            <a:endParaRPr lang="en-US" sz="2000" dirty="0">
+              <a:solidFill>
+                <a:srgbClr val="000000"/>
+              </a:solidFill>
+              <a:latin typeface="!Khmer OS Siemreap" panose="02000500000000020004" pitchFamily="2" charset="0"/>
+              <a:ea typeface="Canva Sans"/>
+              <a:cs typeface="!Khmer OS Siemreap" panose="02000500000000020004" pitchFamily="2" charset="0"/>
+              <a:sym typeface="Canva Sans"/>
+            </a:endParaRPr>
+          </a:p>
+          <a:p>
+            <a:pPr marL="863601" lvl="1" indent="-431801">
+              <a:lnSpc>
+                <a:spcPts val="5600"/>
+              </a:lnSpc>
+              <a:buAutoNum type="arabicPeriod"/>
+            </a:pPr>
+            <a:r>
+              <a:rPr lang="km-KH" sz="2000" dirty="0">
+                <a:solidFill>
+                  <a:srgbClr val="000000"/>
+                </a:solidFill>
+                <a:latin typeface="!Khmer OS Siemreap" panose="02000500000000020004" pitchFamily="2" charset="0"/>
+                <a:ea typeface="Canva Sans"/>
+                <a:cs typeface="!Khmer OS Siemreap" panose="02000500000000020004" pitchFamily="2" charset="0"/>
+                <a:sym typeface="Canva Sans"/>
+              </a:rPr>
+              <a:t>ប្ដូរ </a:t>
+            </a:r>
+            <a:r>
+              <a:rPr lang="en-US" sz="2000" dirty="0">
+                <a:solidFill>
+                  <a:srgbClr val="000000"/>
+                </a:solidFill>
+                <a:latin typeface="!Khmer OS Siemreap" panose="02000500000000020004" pitchFamily="2" charset="0"/>
+                <a:ea typeface="Canva Sans"/>
+                <a:cs typeface="!Khmer OS Siemreap" panose="02000500000000020004" pitchFamily="2" charset="0"/>
+                <a:sym typeface="Canva Sans"/>
+              </a:rPr>
+              <a:t>sales order status </a:t>
+            </a:r>
+            <a:r>
+              <a:rPr lang="km-KH" sz="2000" dirty="0">
+                <a:solidFill>
+                  <a:srgbClr val="000000"/>
+                </a:solidFill>
+                <a:latin typeface="!Khmer OS Siemreap" panose="02000500000000020004" pitchFamily="2" charset="0"/>
+                <a:ea typeface="Canva Sans"/>
+                <a:cs typeface="!Khmer OS Siemreap" panose="02000500000000020004" pitchFamily="2" charset="0"/>
+                <a:sym typeface="Canva Sans"/>
+              </a:rPr>
+              <a:t>ពី</a:t>
+            </a:r>
+            <a:r>
+              <a:rPr lang="en-US" sz="2000" dirty="0">
+                <a:solidFill>
+                  <a:srgbClr val="000000"/>
+                </a:solidFill>
+                <a:latin typeface="!Khmer OS Siemreap" panose="02000500000000020004" pitchFamily="2" charset="0"/>
+                <a:ea typeface="Canva Sans"/>
+                <a:cs typeface="!Khmer OS Siemreap" panose="02000500000000020004" pitchFamily="2" charset="0"/>
+                <a:sym typeface="Canva Sans"/>
+              </a:rPr>
+              <a:t> Allocated → Unallocated</a:t>
+            </a:r>
+            <a:r>
+              <a:rPr lang="km-KH" sz="2000" dirty="0">
+                <a:solidFill>
+                  <a:srgbClr val="000000"/>
+                </a:solidFill>
+                <a:latin typeface="!Khmer OS Siemreap" panose="02000500000000020004" pitchFamily="2" charset="0"/>
+                <a:ea typeface="Canva Sans"/>
+                <a:cs typeface="!Khmer OS Siemreap" panose="02000500000000020004" pitchFamily="2" charset="0"/>
+                <a:sym typeface="Canva Sans"/>
+              </a:rPr>
+              <a:t>។</a:t>
+            </a:r>
+            <a:endParaRPr lang="en-US" sz="2000" dirty="0">
+              <a:solidFill>
+                <a:srgbClr val="000000"/>
+              </a:solidFill>
+              <a:latin typeface="!Khmer OS Siemreap" panose="02000500000000020004" pitchFamily="2" charset="0"/>
+              <a:ea typeface="Canva Sans"/>
+              <a:cs typeface="!Khmer OS Siemreap" panose="02000500000000020004" pitchFamily="2" charset="0"/>
+              <a:sym typeface="Canva Sans"/>
+            </a:endParaRPr>
+          </a:p>
+          <a:p>
+            <a:pPr marL="863601" lvl="1" indent="-431801">
+              <a:lnSpc>
+                <a:spcPts val="5600"/>
+              </a:lnSpc>
+              <a:buAutoNum type="arabicPeriod"/>
+            </a:pPr>
+            <a:r>
+              <a:rPr lang="km-KH" sz="2000" dirty="0">
+                <a:solidFill>
+                  <a:srgbClr val="000000"/>
+                </a:solidFill>
+                <a:latin typeface="!Khmer OS Siemreap" panose="02000500000000020004" pitchFamily="2" charset="0"/>
+                <a:ea typeface="Canva Sans"/>
+                <a:cs typeface="!Khmer OS Siemreap" panose="02000500000000020004" pitchFamily="2" charset="0"/>
+                <a:sym typeface="Canva Sans"/>
+              </a:rPr>
+              <a:t>ពេលធ្វើរួច ចូលទៅកាន់</a:t>
+            </a:r>
+            <a:r>
+              <a:rPr lang="en-US" sz="2000" dirty="0">
+                <a:solidFill>
+                  <a:srgbClr val="000000"/>
+                </a:solidFill>
+                <a:latin typeface="!Khmer OS Siemreap" panose="02000500000000020004" pitchFamily="2" charset="0"/>
+                <a:ea typeface="Canva Sans"/>
+                <a:cs typeface="!Khmer OS Siemreap" panose="02000500000000020004" pitchFamily="2" charset="0"/>
+                <a:sym typeface="Canva Sans"/>
+              </a:rPr>
+              <a:t> Order Editing</a:t>
+            </a:r>
+            <a:r>
+              <a:rPr lang="km-KH" sz="2000" dirty="0">
+                <a:solidFill>
+                  <a:srgbClr val="000000"/>
+                </a:solidFill>
+                <a:latin typeface="!Khmer OS Siemreap" panose="02000500000000020004" pitchFamily="2" charset="0"/>
+                <a:ea typeface="Canva Sans"/>
+                <a:cs typeface="!Khmer OS Siemreap" panose="02000500000000020004" pitchFamily="2" charset="0"/>
+                <a:sym typeface="Canva Sans"/>
+              </a:rPr>
+              <a:t>។</a:t>
+            </a:r>
+            <a:endParaRPr lang="en-US" sz="2000" dirty="0">
+              <a:solidFill>
+                <a:srgbClr val="000000"/>
+              </a:solidFill>
+              <a:latin typeface="!Khmer OS Siemreap" panose="02000500000000020004" pitchFamily="2" charset="0"/>
+              <a:ea typeface="Canva Sans"/>
+              <a:cs typeface="!Khmer OS Siemreap" panose="02000500000000020004" pitchFamily="2" charset="0"/>
+              <a:sym typeface="Canva Sans"/>
+            </a:endParaRPr>
+          </a:p>
+        </p:txBody>
+      </p:sp>
+      <p:sp>
+        <p:nvSpPr>
+          <p:cNvPr id="4" name="TextBox 3">
+            <a:extLst>
+              <a:ext uri="{FF2B5EF4-FFF2-40B4-BE49-F238E27FC236}">
+                <a16:creationId xmlns:a16="http://schemas.microsoft.com/office/drawing/2014/main" id="{EAFBD284-DB0A-643A-D3A1-AB370AEC1903}"/>
+              </a:ext>
+            </a:extLst>
+          </p:cNvPr>
+          <p:cNvSpPr txBox="1"/>
+          <p:nvPr/>
+        </p:nvSpPr>
+        <p:spPr>
+          <a:xfrm>
+            <a:off x="1028700" y="5143500"/>
+            <a:ext cx="16230600" cy="4287905"/>
+          </a:xfrm>
+          <a:prstGeom prst="rect">
+            <a:avLst/>
+          </a:prstGeom>
+          <a:noFill/>
+        </p:spPr>
+        <p:txBody>
+          <a:bodyPr wrap="square">
+            <a:spAutoFit/>
+          </a:bodyPr>
+          <a:lstStyle/>
+          <a:p>
+            <a:pPr>
+              <a:lnSpc>
+                <a:spcPts val="5600"/>
+              </a:lnSpc>
+              <a:spcBef>
+                <a:spcPct val="0"/>
+              </a:spcBef>
+            </a:pPr>
+            <a:r>
+              <a:rPr lang="en-US" sz="2000" b="1" dirty="0">
+                <a:solidFill>
+                  <a:srgbClr val="000000"/>
+                </a:solidFill>
+                <a:latin typeface="!Khmer OS Siemreap" panose="02000500000000020004" pitchFamily="2" charset="0"/>
+                <a:ea typeface="Canva Sans Bold"/>
+                <a:cs typeface="!Khmer OS Siemreap" panose="02000500000000020004" pitchFamily="2" charset="0"/>
+                <a:sym typeface="Canva Sans Bold"/>
+              </a:rPr>
+              <a:t>Editing Sale Order</a:t>
             </a:r>
           </a:p>
           <a:p>
@@ -3764,6 +4793,18 @@
                 <a:spcPct val="0"/>
               </a:spcBef>
             </a:pPr>
+            <a:r>
+              <a:rPr lang="en-US" sz="2000" dirty="0">
+                <a:solidFill>
+                  <a:srgbClr val="000000"/>
+                </a:solidFill>
+                <a:latin typeface="!Khmer OS Siemreap" panose="02000500000000020004" pitchFamily="2" charset="0"/>
+                <a:ea typeface="Canva Sans"/>
+                <a:cs typeface="!Khmer OS Siemreap" panose="02000500000000020004" pitchFamily="2" charset="0"/>
+                <a:sym typeface="Canva Sans"/>
+              </a:rPr>
+              <a:t>To edit a sales order, it must be set to unallocated first. Afterwards, the sales order will appear under Option Order Editing.</a:t>
+            </a:r>
           </a:p>
           <a:p>
             <a:pPr algn="l">
@@ -3775,73 +4816,73 @@
               </a:spcBef>
             </a:pPr>
             <a:r>
-              <a:rPr lang="en-US" sz="4000">
-                <a:solidFill>
-                  <a:srgbClr val="000000"/>
-                </a:solidFill>
-                <a:latin typeface="Canva Sans"/>
-                <a:ea typeface="Canva Sans"/>
-                <a:cs typeface="Canva Sans"/>
+              <a:rPr lang="en-US" sz="2000" dirty="0">
+                <a:solidFill>
+                  <a:srgbClr val="000000"/>
+                </a:solidFill>
+                <a:latin typeface="!Khmer OS Siemreap" panose="02000500000000020004" pitchFamily="2" charset="0"/>
+                <a:ea typeface="Canva Sans"/>
+                <a:cs typeface="!Khmer OS Siemreap" panose="02000500000000020004" pitchFamily="2" charset="0"/>
                 <a:sym typeface="Canva Sans"/>
               </a:rPr>
               <a:t>Steps to edit a sales order:</a:t>
             </a:r>
           </a:p>
           <a:p>
-            <a:pPr algn="l" marL="863601" indent="-431801" lvl="1">
+            <a:pPr marL="863601" lvl="1" indent="-431801" algn="l">
               <a:lnSpc>
                 <a:spcPts val="5600"/>
               </a:lnSpc>
-              <a:buAutoNum type="arabicPeriod" startAt="1"/>
+              <a:buAutoNum type="arabicPeriod"/>
             </a:pPr>
             <a:r>
-              <a:rPr lang="en-US" sz="4000">
-                <a:solidFill>
-                  <a:srgbClr val="000000"/>
-                </a:solidFill>
-                <a:latin typeface="Canva Sans"/>
-                <a:ea typeface="Canva Sans"/>
-                <a:cs typeface="Canva Sans"/>
+              <a:rPr lang="en-US" sz="2000" dirty="0">
+                <a:solidFill>
+                  <a:srgbClr val="000000"/>
+                </a:solidFill>
+                <a:latin typeface="!Khmer OS Siemreap" panose="02000500000000020004" pitchFamily="2" charset="0"/>
+                <a:ea typeface="Canva Sans"/>
+                <a:cs typeface="!Khmer OS Siemreap" panose="02000500000000020004" pitchFamily="2" charset="0"/>
                 <a:sym typeface="Canva Sans"/>
               </a:rPr>
               <a:t>Navigate to Stock Allocation.</a:t>
             </a:r>
           </a:p>
           <a:p>
-            <a:pPr algn="l" marL="863601" indent="-431801" lvl="1">
+            <a:pPr marL="863601" lvl="1" indent="-431801" algn="l">
               <a:lnSpc>
                 <a:spcPts val="5600"/>
               </a:lnSpc>
-              <a:buAutoNum type="arabicPeriod" startAt="1"/>
+              <a:buAutoNum type="arabicPeriod"/>
             </a:pPr>
             <a:r>
-              <a:rPr lang="en-US" sz="4000">
-                <a:solidFill>
-                  <a:srgbClr val="000000"/>
-                </a:solidFill>
-                <a:latin typeface="Canva Sans"/>
-                <a:ea typeface="Canva Sans"/>
-                <a:cs typeface="Canva Sans"/>
+              <a:rPr lang="en-US" sz="2000" dirty="0">
+                <a:solidFill>
+                  <a:srgbClr val="000000"/>
+                </a:solidFill>
+                <a:latin typeface="!Khmer OS Siemreap" panose="02000500000000020004" pitchFamily="2" charset="0"/>
+                <a:ea typeface="Canva Sans"/>
+                <a:cs typeface="!Khmer OS Siemreap" panose="02000500000000020004" pitchFamily="2" charset="0"/>
                 <a:sym typeface="Canva Sans"/>
               </a:rPr>
               <a:t>Change the sales order status from Allocated → Unallocated.</a:t>
             </a:r>
           </a:p>
           <a:p>
-            <a:pPr algn="l" marL="863601" indent="-431801" lvl="1">
+            <a:pPr marL="863601" lvl="1" indent="-431801" algn="l">
               <a:lnSpc>
                 <a:spcPts val="5600"/>
               </a:lnSpc>
-              <a:buAutoNum type="arabicPeriod" startAt="1"/>
+              <a:buAutoNum type="arabicPeriod"/>
             </a:pPr>
             <a:r>
-              <a:rPr lang="en-US" sz="4000">
-                <a:solidFill>
-                  <a:srgbClr val="000000"/>
-                </a:solidFill>
-                <a:latin typeface="Canva Sans"/>
-                <a:ea typeface="Canva Sans"/>
-                <a:cs typeface="Canva Sans"/>
+              <a:rPr lang="en-US" sz="2000" dirty="0">
+                <a:solidFill>
+                  <a:srgbClr val="000000"/>
+                </a:solidFill>
+                <a:latin typeface="!Khmer OS Siemreap" panose="02000500000000020004" pitchFamily="2" charset="0"/>
+                <a:ea typeface="Canva Sans"/>
+                <a:cs typeface="!Khmer OS Siemreap" panose="02000500000000020004" pitchFamily="2" charset="0"/>
                 <a:sym typeface="Canva Sans"/>
               </a:rPr>
               <a:t>Once completed, proceed to Order Editing.</a:t>
@@ -3858,7 +4899,7 @@
 </file>
 
 <file path=ppt/slides/slide4.xml><?xml version="1.0" encoding="utf-8"?>
-<p:sld xmlns:p="http://schemas.openxmlformats.org/presentationml/2006/main" xmlns:a="http://schemas.openxmlformats.org/drawingml/2006/main" xmlns:r="http://schemas.openxmlformats.org/officeDocument/2006/relationships">
+<p:sld xmlns:a="http://schemas.openxmlformats.org/drawingml/2006/main" xmlns:r="http://schemas.openxmlformats.org/officeDocument/2006/relationships" xmlns:p="http://schemas.openxmlformats.org/presentationml/2006/main">
   <p:cSld>
     <p:spTree>
       <p:nvGrpSpPr>
@@ -3876,12 +4917,12 @@
       </p:grpSpPr>
       <p:sp>
         <p:nvSpPr>
-          <p:cNvPr name="Freeform 2" id="2"/>
+          <p:cNvPr id="2" name="Freeform 2"/>
           <p:cNvSpPr/>
           <p:nvPr/>
         </p:nvSpPr>
         <p:spPr>
-          <a:xfrm flipH="false" flipV="false" rot="0">
+          <a:xfrm>
             <a:off x="2733406" y="0"/>
             <a:ext cx="12821188" cy="10287000"/>
           </a:xfrm>
@@ -3890,9 +4931,9 @@
             <a:gdLst/>
             <a:ahLst/>
             <a:cxnLst/>
-            <a:rect r="r" b="b" t="t" l="l"/>
+            <a:rect l="l" t="t" r="r" b="b"/>
             <a:pathLst>
-              <a:path h="10287000" w="12821188">
+              <a:path w="12821188" h="10287000">
                 <a:moveTo>
                   <a:pt x="0" y="0"/>
                 </a:moveTo>
@@ -3915,10 +4956,17 @@
           <a:blipFill>
             <a:blip r:embed="rId2"/>
             <a:stretch>
-              <a:fillRect l="0" t="0" r="0" b="0"/>
+              <a:fillRect/>
             </a:stretch>
           </a:blipFill>
         </p:spPr>
+        <p:txBody>
+          <a:bodyPr/>
+          <a:lstStyle/>
+          <a:p>
+            <a:endParaRPr lang="en-US"/>
+          </a:p>
+        </p:txBody>
       </p:sp>
     </p:spTree>
   </p:cSld>
@@ -3929,7 +4977,7 @@
 </file>
 
 <file path=ppt/slides/slide5.xml><?xml version="1.0" encoding="utf-8"?>
-<p:sld xmlns:p="http://schemas.openxmlformats.org/presentationml/2006/main" xmlns:a="http://schemas.openxmlformats.org/drawingml/2006/main">
+<p:sld xmlns:a="http://schemas.openxmlformats.org/drawingml/2006/main" xmlns:r="http://schemas.openxmlformats.org/officeDocument/2006/relationships" xmlns:p="http://schemas.openxmlformats.org/presentationml/2006/main">
   <p:cSld>
     <p:spTree>
       <p:nvGrpSpPr>
@@ -3947,45 +4995,57 @@
       </p:grpSpPr>
       <p:sp>
         <p:nvSpPr>
-          <p:cNvPr name="TextBox 2" id="2"/>
-          <p:cNvSpPr txBox="true"/>
+          <p:cNvPr id="2" name="TextBox 2"/>
+          <p:cNvSpPr txBox="1"/>
           <p:nvPr/>
         </p:nvSpPr>
         <p:spPr>
-          <a:xfrm rot="0">
+          <a:xfrm>
             <a:off x="1028700" y="952500"/>
-            <a:ext cx="16230600" cy="3498850"/>
+            <a:ext cx="16230600" cy="2769989"/>
           </a:xfrm>
           <a:prstGeom prst="rect">
             <a:avLst/>
           </a:prstGeom>
         </p:spPr>
         <p:txBody>
-          <a:bodyPr anchor="t" rtlCol="false" tIns="0" lIns="0" bIns="0" rIns="0">
+          <a:bodyPr lIns="0" tIns="0" rIns="0" bIns="0" rtlCol="0" anchor="t">
             <a:spAutoFit/>
           </a:bodyPr>
           <a:lstStyle/>
           <a:p>
-            <a:pPr algn="l">
+            <a:pPr>
               <a:lnSpc>
                 <a:spcPts val="5599"/>
               </a:lnSpc>
             </a:pPr>
             <a:r>
-              <a:rPr lang="en-US" b="true" sz="3999">
-                <a:solidFill>
-                  <a:srgbClr val="000000"/>
-                </a:solidFill>
-                <a:latin typeface="Canva Sans Bold"/>
+              <a:rPr lang="km-KH" sz="2000" dirty="0">
+                <a:solidFill>
+                  <a:srgbClr val="000000"/>
+                </a:solidFill>
+                <a:latin typeface="!Khmer OS Siemreap" panose="02000500000000020004" pitchFamily="2" charset="0"/>
+                <a:ea typeface="Canva Sans"/>
+                <a:cs typeface="!Khmer OS Siemreap" panose="02000500000000020004" pitchFamily="2" charset="0"/>
+                <a:sym typeface="Canva Sans"/>
+              </a:rPr>
+              <a:t>ស្វែងរក </a:t>
+            </a:r>
+            <a:r>
+              <a:rPr lang="en-US" sz="2000" b="1" dirty="0">
+                <a:solidFill>
+                  <a:srgbClr val="000000"/>
+                </a:solidFill>
+                <a:latin typeface="!Khmer OS Siemreap" panose="02000500000000020004" pitchFamily="2" charset="0"/>
                 <a:ea typeface="Canva Sans Bold"/>
-                <a:cs typeface="Canva Sans Bold"/>
+                <a:cs typeface="!Khmer OS Siemreap" panose="02000500000000020004" pitchFamily="2" charset="0"/>
                 <a:sym typeface="Canva Sans Bold"/>
               </a:rPr>
-              <a:t>Search "Stock Allocation"</a:t>
-            </a:r>
-          </a:p>
-          <a:p>
-            <a:pPr algn="l" marL="863599" indent="-431800" lvl="1">
+              <a:t>"Stock Allocation"</a:t>
+            </a:r>
+          </a:p>
+          <a:p>
+            <a:pPr marL="863599" lvl="1" indent="-431800">
               <a:lnSpc>
                 <a:spcPts val="5599"/>
               </a:lnSpc>
@@ -3996,20 +5056,32 @@
               <a:buChar char="•"/>
             </a:pPr>
             <a:r>
-              <a:rPr lang="en-US" sz="3999">
-                <a:solidFill>
-                  <a:srgbClr val="000000"/>
-                </a:solidFill>
-                <a:latin typeface="Canva Sans"/>
-                <a:ea typeface="Canva Sans"/>
-                <a:cs typeface="Canva Sans"/>
-                <a:sym typeface="Canva Sans"/>
-              </a:rPr>
-              <a:t>Click on icon "⚙️"! </a:t>
-            </a:r>
-          </a:p>
-          <a:p>
-            <a:pPr algn="l" marL="863599" indent="-431800" lvl="1">
+              <a:rPr lang="km-KH" sz="2000" dirty="0">
+                <a:solidFill>
+                  <a:srgbClr val="000000"/>
+                </a:solidFill>
+                <a:latin typeface="!Khmer OS Siemreap" panose="02000500000000020004" pitchFamily="2" charset="0"/>
+                <a:ea typeface="Canva Sans"/>
+                <a:cs typeface="!Khmer OS Siemreap" panose="02000500000000020004" pitchFamily="2" charset="0"/>
+                <a:sym typeface="Canva Sans"/>
+              </a:rPr>
+              <a:t>ចុចលើ</a:t>
+            </a:r>
+            <a:r>
+              <a:rPr lang="en-US" sz="2000" dirty="0">
+                <a:solidFill>
+                  <a:srgbClr val="000000"/>
+                </a:solidFill>
+                <a:latin typeface="!Khmer OS Siemreap" panose="02000500000000020004" pitchFamily="2" charset="0"/>
+                <a:ea typeface="Canva Sans"/>
+                <a:cs typeface="!Khmer OS Siemreap" panose="02000500000000020004" pitchFamily="2" charset="0"/>
+                <a:sym typeface="Canva Sans"/>
+              </a:rPr>
+              <a:t> icon "⚙️"! </a:t>
+            </a:r>
+          </a:p>
+          <a:p>
+            <a:pPr marL="863599" lvl="1" indent="-431800">
               <a:lnSpc>
                 <a:spcPts val="5599"/>
               </a:lnSpc>
@@ -4020,20 +5092,77 @@
               <a:buChar char="•"/>
             </a:pPr>
             <a:r>
-              <a:rPr lang="en-US" sz="3999">
-                <a:solidFill>
-                  <a:srgbClr val="000000"/>
-                </a:solidFill>
-                <a:latin typeface="Canva Sans"/>
-                <a:ea typeface="Canva Sans"/>
-                <a:cs typeface="Canva Sans"/>
-                <a:sym typeface="Canva Sans"/>
-              </a:rPr>
-              <a:t>Then, click on the search bar and type "Stock Allocation" to search. </a:t>
-            </a:r>
-          </a:p>
-          <a:p>
-            <a:pPr algn="l" marL="863599" indent="-431800" lvl="1">
+              <a:rPr lang="km-KH" sz="2000" dirty="0">
+                <a:solidFill>
+                  <a:srgbClr val="000000"/>
+                </a:solidFill>
+                <a:latin typeface="!Khmer OS Siemreap" panose="02000500000000020004" pitchFamily="2" charset="0"/>
+                <a:ea typeface="Canva Sans"/>
+                <a:cs typeface="!Khmer OS Siemreap" panose="02000500000000020004" pitchFamily="2" charset="0"/>
+                <a:sym typeface="Canva Sans"/>
+              </a:rPr>
+              <a:t>បន្ទាប់មកចុចលើ</a:t>
+            </a:r>
+            <a:r>
+              <a:rPr lang="en-US" sz="2000" dirty="0">
+                <a:solidFill>
+                  <a:srgbClr val="000000"/>
+                </a:solidFill>
+                <a:latin typeface="!Khmer OS Siemreap" panose="02000500000000020004" pitchFamily="2" charset="0"/>
+                <a:ea typeface="Canva Sans"/>
+                <a:cs typeface="!Khmer OS Siemreap" panose="02000500000000020004" pitchFamily="2" charset="0"/>
+                <a:sym typeface="Canva Sans"/>
+              </a:rPr>
+              <a:t> search bar </a:t>
+            </a:r>
+            <a:r>
+              <a:rPr lang="km-KH" sz="2000" dirty="0">
+                <a:solidFill>
+                  <a:srgbClr val="000000"/>
+                </a:solidFill>
+                <a:latin typeface="!Khmer OS Siemreap" panose="02000500000000020004" pitchFamily="2" charset="0"/>
+                <a:ea typeface="Canva Sans"/>
+                <a:cs typeface="!Khmer OS Siemreap" panose="02000500000000020004" pitchFamily="2" charset="0"/>
+                <a:sym typeface="Canva Sans"/>
+              </a:rPr>
+              <a:t>និងវាយ </a:t>
+            </a:r>
+            <a:r>
+              <a:rPr lang="en-US" sz="2000" dirty="0">
+                <a:solidFill>
+                  <a:srgbClr val="000000"/>
+                </a:solidFill>
+                <a:latin typeface="!Khmer OS Siemreap" panose="02000500000000020004" pitchFamily="2" charset="0"/>
+                <a:ea typeface="Canva Sans"/>
+                <a:cs typeface="!Khmer OS Siemreap" panose="02000500000000020004" pitchFamily="2" charset="0"/>
+                <a:sym typeface="Canva Sans"/>
+              </a:rPr>
+              <a:t>"Stock Allocation"</a:t>
+            </a:r>
+            <a:r>
+              <a:rPr lang="km-KH" sz="2000" dirty="0">
+                <a:solidFill>
+                  <a:srgbClr val="000000"/>
+                </a:solidFill>
+                <a:latin typeface="!Khmer OS Siemreap" panose="02000500000000020004" pitchFamily="2" charset="0"/>
+                <a:ea typeface="Canva Sans"/>
+                <a:cs typeface="!Khmer OS Siemreap" panose="02000500000000020004" pitchFamily="2" charset="0"/>
+                <a:sym typeface="Canva Sans"/>
+              </a:rPr>
+              <a:t>​។</a:t>
+            </a:r>
+            <a:endParaRPr lang="en-US" sz="2000" dirty="0">
+              <a:solidFill>
+                <a:srgbClr val="000000"/>
+              </a:solidFill>
+              <a:latin typeface="!Khmer OS Siemreap" panose="02000500000000020004" pitchFamily="2" charset="0"/>
+              <a:ea typeface="Canva Sans"/>
+              <a:cs typeface="!Khmer OS Siemreap" panose="02000500000000020004" pitchFamily="2" charset="0"/>
+              <a:sym typeface="Canva Sans"/>
+            </a:endParaRPr>
+          </a:p>
+          <a:p>
+            <a:pPr marL="863599" lvl="1" indent="-431800">
               <a:lnSpc>
                 <a:spcPts val="5599"/>
               </a:lnSpc>
@@ -4044,13 +5173,142 @@
               <a:buChar char="•"/>
             </a:pPr>
             <a:r>
-              <a:rPr lang="en-US" sz="3999">
+              <a:rPr lang="km-KH" sz="2000" dirty="0">
+                <a:solidFill>
+                  <a:srgbClr val="000000"/>
+                </a:solidFill>
+                <a:latin typeface="!Khmer OS Siemreap" panose="02000500000000020004" pitchFamily="2" charset="0"/>
+                <a:ea typeface="Canva Sans"/>
+                <a:cs typeface="!Khmer OS Siemreap" panose="02000500000000020004" pitchFamily="2" charset="0"/>
+                <a:sym typeface="Canva Sans"/>
+              </a:rPr>
+              <a:t>នៅពេលម៉ឺនុយត្រូវបានបង្ហាញនោះពួកយើងចុចលើវា។</a:t>
+            </a:r>
+            <a:endParaRPr lang="en-US" sz="2000" dirty="0">
+              <a:solidFill>
+                <a:srgbClr val="000000"/>
+              </a:solidFill>
+              <a:latin typeface="!Khmer OS Siemreap" panose="02000500000000020004" pitchFamily="2" charset="0"/>
+              <a:ea typeface="Canva Sans"/>
+              <a:cs typeface="!Khmer OS Siemreap" panose="02000500000000020004" pitchFamily="2" charset="0"/>
+              <a:sym typeface="Canva Sans"/>
+            </a:endParaRPr>
+          </a:p>
+        </p:txBody>
+      </p:sp>
+      <p:sp>
+        <p:nvSpPr>
+          <p:cNvPr id="4" name="TextBox 3">
+            <a:extLst>
+              <a:ext uri="{FF2B5EF4-FFF2-40B4-BE49-F238E27FC236}">
+                <a16:creationId xmlns:a16="http://schemas.microsoft.com/office/drawing/2014/main" id="{CEDED481-DCEA-3AC4-343C-3A7BCA043162}"/>
+              </a:ext>
+            </a:extLst>
+          </p:cNvPr>
+          <p:cNvSpPr txBox="1"/>
+          <p:nvPr/>
+        </p:nvSpPr>
+        <p:spPr>
+          <a:xfrm>
+            <a:off x="1028700" y="3753332"/>
+            <a:ext cx="16230600" cy="2851614"/>
+          </a:xfrm>
+          <a:prstGeom prst="rect">
+            <a:avLst/>
+          </a:prstGeom>
+          <a:noFill/>
+        </p:spPr>
+        <p:txBody>
+          <a:bodyPr wrap="square">
+            <a:spAutoFit/>
+          </a:bodyPr>
+          <a:lstStyle/>
+          <a:p>
+            <a:pPr algn="l">
+              <a:lnSpc>
+                <a:spcPts val="5599"/>
+              </a:lnSpc>
+            </a:pPr>
+            <a:r>
+              <a:rPr lang="en-US" sz="2000" b="1" dirty="0">
+                <a:solidFill>
+                  <a:srgbClr val="000000"/>
+                </a:solidFill>
+                <a:latin typeface="Canva Sans Bold"/>
+                <a:ea typeface="Canva Sans Bold"/>
+                <a:cs typeface="!Khmer OS Siemreap" panose="02000500000000020004" pitchFamily="2" charset="0"/>
+                <a:sym typeface="Canva Sans Bold"/>
+              </a:rPr>
+              <a:t>Search "Stock Allocation"</a:t>
+            </a:r>
+          </a:p>
+          <a:p>
+            <a:pPr marL="863599" lvl="1" indent="-431800" algn="l">
+              <a:lnSpc>
+                <a:spcPts val="5599"/>
+              </a:lnSpc>
+              <a:spcBef>
+                <a:spcPct val="0"/>
+              </a:spcBef>
+              <a:buFont typeface="Arial"/>
+              <a:buChar char="•"/>
+            </a:pPr>
+            <a:r>
+              <a:rPr lang="en-US" sz="2000" dirty="0">
                 <a:solidFill>
                   <a:srgbClr val="000000"/>
                 </a:solidFill>
                 <a:latin typeface="Canva Sans"/>
                 <a:ea typeface="Canva Sans"/>
-                <a:cs typeface="Canva Sans"/>
+                <a:cs typeface="!Khmer OS Siemreap" panose="02000500000000020004" pitchFamily="2" charset="0"/>
+                <a:sym typeface="Canva Sans"/>
+              </a:rPr>
+              <a:t>Click on icon "⚙️"! </a:t>
+            </a:r>
+          </a:p>
+          <a:p>
+            <a:pPr marL="863599" lvl="1" indent="-431800" algn="l">
+              <a:lnSpc>
+                <a:spcPts val="5599"/>
+              </a:lnSpc>
+              <a:spcBef>
+                <a:spcPct val="0"/>
+              </a:spcBef>
+              <a:buFont typeface="Arial"/>
+              <a:buChar char="•"/>
+            </a:pPr>
+            <a:r>
+              <a:rPr lang="en-US" sz="2000" dirty="0">
+                <a:solidFill>
+                  <a:srgbClr val="000000"/>
+                </a:solidFill>
+                <a:latin typeface="Canva Sans"/>
+                <a:ea typeface="Canva Sans"/>
+                <a:cs typeface="!Khmer OS Siemreap" panose="02000500000000020004" pitchFamily="2" charset="0"/>
+                <a:sym typeface="Canva Sans"/>
+              </a:rPr>
+              <a:t>Then, click on the search bar and type "Stock Allocation" to search. </a:t>
+            </a:r>
+          </a:p>
+          <a:p>
+            <a:pPr marL="863599" lvl="1" indent="-431800" algn="l">
+              <a:lnSpc>
+                <a:spcPts val="5599"/>
+              </a:lnSpc>
+              <a:spcBef>
+                <a:spcPct val="0"/>
+              </a:spcBef>
+              <a:buFont typeface="Arial"/>
+              <a:buChar char="•"/>
+            </a:pPr>
+            <a:r>
+              <a:rPr lang="en-US" sz="2000" dirty="0">
+                <a:solidFill>
+                  <a:srgbClr val="000000"/>
+                </a:solidFill>
+                <a:latin typeface="Canva Sans"/>
+                <a:ea typeface="Canva Sans"/>
+                <a:cs typeface="!Khmer OS Siemreap" panose="02000500000000020004" pitchFamily="2" charset="0"/>
                 <a:sym typeface="Canva Sans"/>
               </a:rPr>
               <a:t>When the menu is displayed, we click on it.</a:t>
@@ -4067,7 +5325,7 @@
 </file>
 
 <file path=ppt/slides/slide6.xml><?xml version="1.0" encoding="utf-8"?>
-<p:sld xmlns:p="http://schemas.openxmlformats.org/presentationml/2006/main" xmlns:a="http://schemas.openxmlformats.org/drawingml/2006/main" xmlns:r="http://schemas.openxmlformats.org/officeDocument/2006/relationships">
+<p:sld xmlns:a="http://schemas.openxmlformats.org/drawingml/2006/main" xmlns:r="http://schemas.openxmlformats.org/officeDocument/2006/relationships" xmlns:p="http://schemas.openxmlformats.org/presentationml/2006/main">
   <p:cSld>
     <p:spTree>
       <p:nvGrpSpPr>
@@ -4085,12 +5343,12 @@
       </p:grpSpPr>
       <p:sp>
         <p:nvSpPr>
-          <p:cNvPr name="Freeform 2" id="2"/>
+          <p:cNvPr id="2" name="Freeform 2"/>
           <p:cNvSpPr/>
           <p:nvPr/>
         </p:nvSpPr>
         <p:spPr>
-          <a:xfrm flipH="false" flipV="false" rot="0">
+          <a:xfrm>
             <a:off x="2702043" y="0"/>
             <a:ext cx="12883914" cy="10287000"/>
           </a:xfrm>
@@ -4099,9 +5357,9 @@
             <a:gdLst/>
             <a:ahLst/>
             <a:cxnLst/>
-            <a:rect r="r" b="b" t="t" l="l"/>
+            <a:rect l="l" t="t" r="r" b="b"/>
             <a:pathLst>
-              <a:path h="10287000" w="12883914">
+              <a:path w="12883914" h="10287000">
                 <a:moveTo>
                   <a:pt x="0" y="0"/>
                 </a:moveTo>
@@ -4124,10 +5382,17 @@
           <a:blipFill>
             <a:blip r:embed="rId2"/>
             <a:stretch>
-              <a:fillRect l="0" t="0" r="0" b="0"/>
+              <a:fillRect/>
             </a:stretch>
           </a:blipFill>
         </p:spPr>
+        <p:txBody>
+          <a:bodyPr/>
+          <a:lstStyle/>
+          <a:p>
+            <a:endParaRPr lang="en-US"/>
+          </a:p>
+        </p:txBody>
       </p:sp>
     </p:spTree>
   </p:cSld>
@@ -4138,7 +5403,7 @@
 </file>
 
 <file path=ppt/slides/slide7.xml><?xml version="1.0" encoding="utf-8"?>
-<p:sld xmlns:p="http://schemas.openxmlformats.org/presentationml/2006/main" xmlns:a="http://schemas.openxmlformats.org/drawingml/2006/main">
+<p:sld xmlns:a="http://schemas.openxmlformats.org/drawingml/2006/main" xmlns:r="http://schemas.openxmlformats.org/officeDocument/2006/relationships" xmlns:p="http://schemas.openxmlformats.org/presentationml/2006/main">
   <p:cSld>
     <p:spTree>
       <p:nvGrpSpPr>
@@ -4156,21 +5421,21 @@
       </p:grpSpPr>
       <p:sp>
         <p:nvSpPr>
-          <p:cNvPr name="TextBox 2" id="2"/>
-          <p:cNvSpPr txBox="true"/>
+          <p:cNvPr id="2" name="TextBox 2"/>
+          <p:cNvSpPr txBox="1"/>
           <p:nvPr/>
         </p:nvSpPr>
         <p:spPr>
-          <a:xfrm rot="0">
+          <a:xfrm>
             <a:off x="1028700" y="952500"/>
-            <a:ext cx="16230600" cy="4091749"/>
+            <a:ext cx="16230600" cy="3427220"/>
           </a:xfrm>
           <a:prstGeom prst="rect">
             <a:avLst/>
           </a:prstGeom>
         </p:spPr>
         <p:txBody>
-          <a:bodyPr anchor="t" rtlCol="false" tIns="0" lIns="0" bIns="0" rIns="0">
+          <a:bodyPr lIns="0" tIns="0" rIns="0" bIns="0" rtlCol="0" anchor="t">
             <a:spAutoFit/>
           </a:bodyPr>
           <a:lstStyle/>
@@ -4184,13 +5449,291 @@
               </a:spcBef>
             </a:pPr>
             <a:r>
-              <a:rPr lang="en-US" b="true" sz="3907">
-                <a:solidFill>
-                  <a:srgbClr val="000000"/>
-                </a:solidFill>
-                <a:latin typeface="Canva Sans Bold"/>
+              <a:rPr lang="en-US" sz="2000" b="1" dirty="0">
+                <a:solidFill>
+                  <a:srgbClr val="000000"/>
+                </a:solidFill>
+                <a:latin typeface="!Khmer OS Siemreap" panose="02000500000000020004" pitchFamily="2" charset="0"/>
                 <a:ea typeface="Canva Sans Bold"/>
-                <a:cs typeface="Canva Sans Bold"/>
+                <a:cs typeface="!Khmer OS Siemreap" panose="02000500000000020004" pitchFamily="2" charset="0"/>
+                <a:sym typeface="Canva Sans Bold"/>
+              </a:rPr>
+              <a:t>Unallocated Tab</a:t>
+            </a:r>
+          </a:p>
+          <a:p>
+            <a:pPr>
+              <a:lnSpc>
+                <a:spcPts val="5470"/>
+              </a:lnSpc>
+              <a:spcBef>
+                <a:spcPct val="0"/>
+              </a:spcBef>
+            </a:pPr>
+            <a:r>
+              <a:rPr lang="en-US" sz="2000" dirty="0">
+                <a:solidFill>
+                  <a:srgbClr val="000000"/>
+                </a:solidFill>
+                <a:latin typeface="!Khmer OS Siemreap" panose="02000500000000020004" pitchFamily="2" charset="0"/>
+                <a:ea typeface="Canva Sans"/>
+                <a:cs typeface="!Khmer OS Siemreap" panose="02000500000000020004" pitchFamily="2" charset="0"/>
+                <a:sym typeface="Canva Sans"/>
+              </a:rPr>
+              <a:t>Tab "Unallocated" </a:t>
+            </a:r>
+            <a:r>
+              <a:rPr lang="km-KH" sz="2000" dirty="0">
+                <a:solidFill>
+                  <a:srgbClr val="000000"/>
+                </a:solidFill>
+                <a:latin typeface="!Khmer OS Siemreap" panose="02000500000000020004" pitchFamily="2" charset="0"/>
+                <a:ea typeface="Canva Sans"/>
+                <a:cs typeface="!Khmer OS Siemreap" panose="02000500000000020004" pitchFamily="2" charset="0"/>
+                <a:sym typeface="Canva Sans"/>
+              </a:rPr>
+              <a:t>បង្ហាញអំពី </a:t>
+            </a:r>
+            <a:r>
+              <a:rPr lang="en-US" sz="2000" dirty="0">
+                <a:solidFill>
+                  <a:srgbClr val="000000"/>
+                </a:solidFill>
+                <a:latin typeface="!Khmer OS Siemreap" panose="02000500000000020004" pitchFamily="2" charset="0"/>
+                <a:ea typeface="Canva Sans"/>
+                <a:cs typeface="!Khmer OS Siemreap" panose="02000500000000020004" pitchFamily="2" charset="0"/>
+                <a:sym typeface="Canva Sans"/>
+              </a:rPr>
+              <a:t>order</a:t>
+            </a:r>
+            <a:r>
+              <a:rPr lang="km-KH" sz="2000" dirty="0">
+                <a:solidFill>
+                  <a:srgbClr val="000000"/>
+                </a:solidFill>
+                <a:latin typeface="!Khmer OS Siemreap" panose="02000500000000020004" pitchFamily="2" charset="0"/>
+                <a:ea typeface="Canva Sans"/>
+                <a:cs typeface="!Khmer OS Siemreap" panose="02000500000000020004" pitchFamily="2" charset="0"/>
+                <a:sym typeface="Canva Sans"/>
+              </a:rPr>
+              <a:t>​ ណាដែលខ្វះ។</a:t>
+            </a:r>
+            <a:endParaRPr lang="en-US" sz="2000" dirty="0">
+              <a:solidFill>
+                <a:srgbClr val="000000"/>
+              </a:solidFill>
+              <a:latin typeface="!Khmer OS Siemreap" panose="02000500000000020004" pitchFamily="2" charset="0"/>
+              <a:ea typeface="Canva Sans"/>
+              <a:cs typeface="!Khmer OS Siemreap" panose="02000500000000020004" pitchFamily="2" charset="0"/>
+              <a:sym typeface="Canva Sans"/>
+            </a:endParaRPr>
+          </a:p>
+          <a:p>
+            <a:pPr>
+              <a:lnSpc>
+                <a:spcPts val="5470"/>
+              </a:lnSpc>
+              <a:spcBef>
+                <a:spcPct val="0"/>
+              </a:spcBef>
+            </a:pPr>
+            <a:r>
+              <a:rPr lang="km-KH" sz="2000" dirty="0">
+                <a:solidFill>
+                  <a:srgbClr val="000000"/>
+                </a:solidFill>
+                <a:latin typeface="!Khmer OS Siemreap" panose="02000500000000020004" pitchFamily="2" charset="0"/>
+                <a:ea typeface="Canva Sans"/>
+                <a:cs typeface="!Khmer OS Siemreap" panose="02000500000000020004" pitchFamily="2" charset="0"/>
+                <a:sym typeface="Canva Sans"/>
+              </a:rPr>
+              <a:t>ប្រសិនបើពួកយើងចង់ធ្វើឲ្យវា</a:t>
+            </a:r>
+            <a:r>
+              <a:rPr lang="en-US" sz="2000" dirty="0">
+                <a:solidFill>
+                  <a:srgbClr val="000000"/>
+                </a:solidFill>
+                <a:latin typeface="!Khmer OS Siemreap" panose="02000500000000020004" pitchFamily="2" charset="0"/>
+                <a:ea typeface="Canva Sans"/>
+                <a:cs typeface="!Khmer OS Siemreap" panose="02000500000000020004" pitchFamily="2" charset="0"/>
+                <a:sym typeface="Canva Sans"/>
+              </a:rPr>
+              <a:t> allocated (Unallocated </a:t>
+            </a:r>
+            <a:r>
+              <a:rPr lang="km-KH" sz="2000" dirty="0">
+                <a:solidFill>
+                  <a:srgbClr val="000000"/>
+                </a:solidFill>
+                <a:latin typeface="!Khmer OS Siemreap" panose="02000500000000020004" pitchFamily="2" charset="0"/>
+                <a:ea typeface="Canva Sans"/>
+                <a:cs typeface="!Khmer OS Siemreap" panose="02000500000000020004" pitchFamily="2" charset="0"/>
+                <a:sym typeface="Canva Sans"/>
+              </a:rPr>
+              <a:t>ទៅជា</a:t>
+            </a:r>
+            <a:r>
+              <a:rPr lang="en-US" sz="2000" dirty="0">
+                <a:solidFill>
+                  <a:srgbClr val="000000"/>
+                </a:solidFill>
+                <a:latin typeface="!Khmer OS Siemreap" panose="02000500000000020004" pitchFamily="2" charset="0"/>
+                <a:ea typeface="Canva Sans"/>
+                <a:cs typeface="!Khmer OS Siemreap" panose="02000500000000020004" pitchFamily="2" charset="0"/>
+                <a:sym typeface="Canva Sans"/>
+              </a:rPr>
+              <a:t> Allocated)</a:t>
+            </a:r>
+            <a:r>
+              <a:rPr lang="km-KH" sz="2000" dirty="0">
+                <a:solidFill>
+                  <a:srgbClr val="000000"/>
+                </a:solidFill>
+                <a:latin typeface="!Khmer OS Siemreap" panose="02000500000000020004" pitchFamily="2" charset="0"/>
+                <a:ea typeface="Canva Sans"/>
+                <a:cs typeface="!Khmer OS Siemreap" panose="02000500000000020004" pitchFamily="2" charset="0"/>
+                <a:sym typeface="Canva Sans"/>
+              </a:rPr>
+              <a:t> ពួកយើងត្រូវ៖</a:t>
+            </a:r>
+            <a:endParaRPr lang="en-US" sz="2000" dirty="0">
+              <a:solidFill>
+                <a:srgbClr val="000000"/>
+              </a:solidFill>
+              <a:latin typeface="!Khmer OS Siemreap" panose="02000500000000020004" pitchFamily="2" charset="0"/>
+              <a:ea typeface="Canva Sans"/>
+              <a:cs typeface="!Khmer OS Siemreap" panose="02000500000000020004" pitchFamily="2" charset="0"/>
+              <a:sym typeface="Canva Sans"/>
+            </a:endParaRPr>
+          </a:p>
+          <a:p>
+            <a:pPr marL="843636" lvl="1" indent="-421818">
+              <a:lnSpc>
+                <a:spcPts val="5470"/>
+              </a:lnSpc>
+              <a:buAutoNum type="arabicPeriod"/>
+            </a:pPr>
+            <a:r>
+              <a:rPr lang="km-KH" sz="2000" dirty="0">
+                <a:solidFill>
+                  <a:srgbClr val="000000"/>
+                </a:solidFill>
+                <a:latin typeface="!Khmer OS Siemreap" panose="02000500000000020004" pitchFamily="2" charset="0"/>
+                <a:ea typeface="Canva Sans"/>
+                <a:cs typeface="!Khmer OS Siemreap" panose="02000500000000020004" pitchFamily="2" charset="0"/>
+                <a:sym typeface="Canva Sans"/>
+              </a:rPr>
+              <a:t>ជ្រើសរើសជួរដេកមួយដោយចុចលើវា (វានឹងហាយលាយពណ៌ខៀវ)។</a:t>
+            </a:r>
+            <a:endParaRPr lang="en-US" sz="2000" dirty="0">
+              <a:solidFill>
+                <a:srgbClr val="000000"/>
+              </a:solidFill>
+              <a:latin typeface="!Khmer OS Siemreap" panose="02000500000000020004" pitchFamily="2" charset="0"/>
+              <a:ea typeface="Canva Sans"/>
+              <a:cs typeface="!Khmer OS Siemreap" panose="02000500000000020004" pitchFamily="2" charset="0"/>
+              <a:sym typeface="Canva Sans"/>
+            </a:endParaRPr>
+          </a:p>
+          <a:p>
+            <a:pPr marL="843636" lvl="1" indent="-421818">
+              <a:lnSpc>
+                <a:spcPts val="5470"/>
+              </a:lnSpc>
+              <a:buAutoNum type="arabicPeriod"/>
+            </a:pPr>
+            <a:r>
+              <a:rPr lang="km-KH" sz="2000" dirty="0">
+                <a:solidFill>
+                  <a:srgbClr val="000000"/>
+                </a:solidFill>
+                <a:latin typeface="!Khmer OS Siemreap" panose="02000500000000020004" pitchFamily="2" charset="0"/>
+                <a:ea typeface="Canva Sans"/>
+                <a:cs typeface="!Khmer OS Siemreap" panose="02000500000000020004" pitchFamily="2" charset="0"/>
+                <a:sym typeface="Canva Sans"/>
+              </a:rPr>
+              <a:t>បន្ទាប់មកចុចលើប៊ូតុង</a:t>
+            </a:r>
+            <a:r>
+              <a:rPr lang="en-US" sz="2000" dirty="0">
+                <a:solidFill>
+                  <a:srgbClr val="000000"/>
+                </a:solidFill>
+                <a:latin typeface="!Khmer OS Siemreap" panose="02000500000000020004" pitchFamily="2" charset="0"/>
+                <a:ea typeface="Canva Sans"/>
+                <a:cs typeface="!Khmer OS Siemreap" panose="02000500000000020004" pitchFamily="2" charset="0"/>
+                <a:sym typeface="Canva Sans"/>
+              </a:rPr>
+              <a:t> "Allocation"</a:t>
+            </a:r>
+            <a:r>
+              <a:rPr lang="km-KH" sz="2000" dirty="0">
+                <a:solidFill>
+                  <a:srgbClr val="000000"/>
+                </a:solidFill>
+                <a:latin typeface="!Khmer OS Siemreap" panose="02000500000000020004" pitchFamily="2" charset="0"/>
+                <a:ea typeface="Canva Sans"/>
+                <a:cs typeface="!Khmer OS Siemreap" panose="02000500000000020004" pitchFamily="2" charset="0"/>
+                <a:sym typeface="Canva Sans"/>
+              </a:rPr>
+              <a:t>។</a:t>
+            </a:r>
+            <a:endParaRPr lang="en-US" sz="2000" dirty="0">
+              <a:solidFill>
+                <a:srgbClr val="000000"/>
+              </a:solidFill>
+              <a:latin typeface="!Khmer OS Siemreap" panose="02000500000000020004" pitchFamily="2" charset="0"/>
+              <a:ea typeface="Canva Sans"/>
+              <a:cs typeface="!Khmer OS Siemreap" panose="02000500000000020004" pitchFamily="2" charset="0"/>
+              <a:sym typeface="Canva Sans"/>
+            </a:endParaRPr>
+          </a:p>
+        </p:txBody>
+      </p:sp>
+      <p:sp>
+        <p:nvSpPr>
+          <p:cNvPr id="4" name="TextBox 2">
+            <a:extLst>
+              <a:ext uri="{FF2B5EF4-FFF2-40B4-BE49-F238E27FC236}">
+                <a16:creationId xmlns:a16="http://schemas.microsoft.com/office/drawing/2014/main" id="{C7C78AD6-B214-A4E7-0127-D423E0F31928}"/>
+              </a:ext>
+            </a:extLst>
+          </p:cNvPr>
+          <p:cNvSpPr txBox="1"/>
+          <p:nvPr/>
+        </p:nvSpPr>
+        <p:spPr>
+          <a:xfrm>
+            <a:off x="1028700" y="4446849"/>
+            <a:ext cx="16230600" cy="3416513"/>
+          </a:xfrm>
+          <a:prstGeom prst="rect">
+            <a:avLst/>
+          </a:prstGeom>
+        </p:spPr>
+        <p:txBody>
+          <a:bodyPr lIns="0" tIns="0" rIns="0" bIns="0" rtlCol="0" anchor="t">
+            <a:spAutoFit/>
+          </a:bodyPr>
+          <a:lstStyle/>
+          <a:p>
+            <a:pPr>
+              <a:lnSpc>
+                <a:spcPts val="5470"/>
+              </a:lnSpc>
+              <a:spcBef>
+                <a:spcPct val="0"/>
+              </a:spcBef>
+            </a:pPr>
+            <a:r>
+              <a:rPr lang="en-US" sz="2000" b="1" dirty="0">
+                <a:solidFill>
+                  <a:srgbClr val="000000"/>
+                </a:solidFill>
+                <a:latin typeface="!Khmer OS Siemreap" panose="02000500000000020004" pitchFamily="2" charset="0"/>
+                <a:ea typeface="Canva Sans Bold"/>
+                <a:cs typeface="!Khmer OS Siemreap" panose="02000500000000020004" pitchFamily="2" charset="0"/>
                 <a:sym typeface="Canva Sans Bold"/>
               </a:rPr>
               <a:t>Unallocated Tab</a:t>
@@ -4206,13 +5749,13 @@
               </a:spcBef>
             </a:pPr>
             <a:r>
-              <a:rPr lang="en-US" sz="3907">
-                <a:solidFill>
-                  <a:srgbClr val="000000"/>
-                </a:solidFill>
-                <a:latin typeface="Canva Sans"/>
-                <a:ea typeface="Canva Sans"/>
-                <a:cs typeface="Canva Sans"/>
+              <a:rPr lang="en-US" sz="2000" dirty="0">
+                <a:solidFill>
+                  <a:srgbClr val="000000"/>
+                </a:solidFill>
+                <a:latin typeface="!Khmer OS Siemreap" panose="02000500000000020004" pitchFamily="2" charset="0"/>
+                <a:ea typeface="Canva Sans"/>
+                <a:cs typeface="!Khmer OS Siemreap" panose="02000500000000020004" pitchFamily="2" charset="0"/>
                 <a:sym typeface="Canva Sans"/>
               </a:rPr>
               <a:t>Tab "Unallocated" shows the order which is shortage.</a:t>
@@ -4228,53 +5771,53 @@
               </a:spcBef>
             </a:pPr>
             <a:r>
-              <a:rPr lang="en-US" sz="3907">
-                <a:solidFill>
-                  <a:srgbClr val="000000"/>
-                </a:solidFill>
-                <a:latin typeface="Canva Sans"/>
-                <a:ea typeface="Canva Sans"/>
-                <a:cs typeface="Canva Sans"/>
+              <a:rPr lang="en-US" sz="2000" dirty="0">
+                <a:solidFill>
+                  <a:srgbClr val="000000"/>
+                </a:solidFill>
+                <a:latin typeface="!Khmer OS Siemreap" panose="02000500000000020004" pitchFamily="2" charset="0"/>
+                <a:ea typeface="Canva Sans"/>
+                <a:cs typeface="!Khmer OS Siemreap" panose="02000500000000020004" pitchFamily="2" charset="0"/>
                 <a:sym typeface="Canva Sans"/>
               </a:rPr>
               <a:t>If we want to make it allocated (Unallocated to Allocated), we need to:</a:t>
             </a:r>
           </a:p>
           <a:p>
-            <a:pPr algn="l" marL="843636" indent="-421818" lvl="1">
+            <a:pPr marL="843636" lvl="1" indent="-421818" algn="l">
               <a:lnSpc>
                 <a:spcPts val="5470"/>
               </a:lnSpc>
-              <a:buAutoNum type="arabicPeriod" startAt="1"/>
+              <a:buAutoNum type="arabicPeriod"/>
             </a:pPr>
             <a:r>
-              <a:rPr lang="en-US" sz="3907">
-                <a:solidFill>
-                  <a:srgbClr val="000000"/>
-                </a:solidFill>
-                <a:latin typeface="Canva Sans"/>
-                <a:ea typeface="Canva Sans"/>
-                <a:cs typeface="Canva Sans"/>
+              <a:rPr lang="en-US" sz="2000" dirty="0">
+                <a:solidFill>
+                  <a:srgbClr val="000000"/>
+                </a:solidFill>
+                <a:latin typeface="!Khmer OS Siemreap" panose="02000500000000020004" pitchFamily="2" charset="0"/>
+                <a:ea typeface="Canva Sans"/>
+                <a:cs typeface="!Khmer OS Siemreap" panose="02000500000000020004" pitchFamily="2" charset="0"/>
                 <a:sym typeface="Canva Sans"/>
               </a:rPr>
               <a:t>Select one row by clicking on it (it will highlight blue).</a:t>
             </a:r>
           </a:p>
           <a:p>
-            <a:pPr algn="l" marL="843636" indent="-421818" lvl="1">
+            <a:pPr marL="843636" lvl="1" indent="-421818" algn="l">
               <a:lnSpc>
                 <a:spcPts val="5470"/>
               </a:lnSpc>
-              <a:buAutoNum type="arabicPeriod" startAt="1"/>
+              <a:buAutoNum type="arabicPeriod"/>
             </a:pPr>
             <a:r>
-              <a:rPr lang="en-US" sz="3907">
-                <a:solidFill>
-                  <a:srgbClr val="000000"/>
-                </a:solidFill>
-                <a:latin typeface="Canva Sans"/>
-                <a:ea typeface="Canva Sans"/>
-                <a:cs typeface="Canva Sans"/>
+              <a:rPr lang="en-US" sz="2000" dirty="0">
+                <a:solidFill>
+                  <a:srgbClr val="000000"/>
+                </a:solidFill>
+                <a:latin typeface="!Khmer OS Siemreap" panose="02000500000000020004" pitchFamily="2" charset="0"/>
+                <a:ea typeface="Canva Sans"/>
+                <a:cs typeface="!Khmer OS Siemreap" panose="02000500000000020004" pitchFamily="2" charset="0"/>
                 <a:sym typeface="Canva Sans"/>
               </a:rPr>
               <a:t>And then click on button "Allocation"</a:t>
@@ -4291,7 +5834,7 @@
 </file>
 
 <file path=ppt/slides/slide8.xml><?xml version="1.0" encoding="utf-8"?>
-<p:sld xmlns:p="http://schemas.openxmlformats.org/presentationml/2006/main" xmlns:a="http://schemas.openxmlformats.org/drawingml/2006/main" xmlns:r="http://schemas.openxmlformats.org/officeDocument/2006/relationships">
+<p:sld xmlns:a="http://schemas.openxmlformats.org/drawingml/2006/main" xmlns:r="http://schemas.openxmlformats.org/officeDocument/2006/relationships" xmlns:p="http://schemas.openxmlformats.org/presentationml/2006/main">
   <p:cSld>
     <p:spTree>
       <p:nvGrpSpPr>
@@ -4309,12 +5852,12 @@
       </p:grpSpPr>
       <p:sp>
         <p:nvSpPr>
-          <p:cNvPr name="Freeform 2" id="2"/>
+          <p:cNvPr id="2" name="Freeform 2"/>
           <p:cNvSpPr/>
           <p:nvPr/>
         </p:nvSpPr>
         <p:spPr>
-          <a:xfrm flipH="false" flipV="false" rot="0">
+          <a:xfrm>
             <a:off x="2702043" y="0"/>
             <a:ext cx="12883914" cy="10287000"/>
           </a:xfrm>
@@ -4323,9 +5866,9 @@
             <a:gdLst/>
             <a:ahLst/>
             <a:cxnLst/>
-            <a:rect r="r" b="b" t="t" l="l"/>
+            <a:rect l="l" t="t" r="r" b="b"/>
             <a:pathLst>
-              <a:path h="10287000" w="12883914">
+              <a:path w="12883914" h="10287000">
                 <a:moveTo>
                   <a:pt x="0" y="0"/>
                 </a:moveTo>
@@ -4348,10 +5891,17 @@
           <a:blipFill>
             <a:blip r:embed="rId2"/>
             <a:stretch>
-              <a:fillRect l="0" t="0" r="0" b="0"/>
+              <a:fillRect/>
             </a:stretch>
           </a:blipFill>
         </p:spPr>
+        <p:txBody>
+          <a:bodyPr/>
+          <a:lstStyle/>
+          <a:p>
+            <a:endParaRPr lang="en-US"/>
+          </a:p>
+        </p:txBody>
       </p:sp>
     </p:spTree>
   </p:cSld>
@@ -4362,7 +5912,7 @@
 </file>
 
 <file path=ppt/slides/slide9.xml><?xml version="1.0" encoding="utf-8"?>
-<p:sld xmlns:p="http://schemas.openxmlformats.org/presentationml/2006/main" xmlns:a="http://schemas.openxmlformats.org/drawingml/2006/main">
+<p:sld xmlns:a="http://schemas.openxmlformats.org/drawingml/2006/main" xmlns:r="http://schemas.openxmlformats.org/officeDocument/2006/relationships" xmlns:p="http://schemas.openxmlformats.org/presentationml/2006/main">
   <p:cSld>
     <p:spTree>
       <p:nvGrpSpPr>
@@ -4380,21 +5930,21 @@
       </p:grpSpPr>
       <p:sp>
         <p:nvSpPr>
-          <p:cNvPr name="TextBox 2" id="2"/>
-          <p:cNvSpPr txBox="true"/>
+          <p:cNvPr id="2" name="TextBox 2"/>
+          <p:cNvSpPr txBox="1"/>
           <p:nvPr/>
         </p:nvSpPr>
         <p:spPr>
-          <a:xfrm rot="0">
+          <a:xfrm>
             <a:off x="1028700" y="952500"/>
-            <a:ext cx="16230600" cy="4203700"/>
+            <a:ext cx="16230600" cy="3488134"/>
           </a:xfrm>
           <a:prstGeom prst="rect">
             <a:avLst/>
           </a:prstGeom>
         </p:spPr>
         <p:txBody>
-          <a:bodyPr anchor="t" rtlCol="false" tIns="0" lIns="0" bIns="0" rIns="0">
+          <a:bodyPr lIns="0" tIns="0" rIns="0" bIns="0" rtlCol="0" anchor="t">
             <a:spAutoFit/>
           </a:bodyPr>
           <a:lstStyle/>
@@ -4408,13 +5958,13 @@
               </a:spcBef>
             </a:pPr>
             <a:r>
-              <a:rPr lang="en-US" b="true" sz="3999">
-                <a:solidFill>
-                  <a:srgbClr val="000000"/>
-                </a:solidFill>
-                <a:latin typeface="Canva Sans Bold"/>
+              <a:rPr lang="en-US" sz="2000" b="1" dirty="0">
+                <a:solidFill>
+                  <a:srgbClr val="000000"/>
+                </a:solidFill>
+                <a:latin typeface="!Khmer OS Siemreap" panose="02000500000000020004" pitchFamily="2" charset="0"/>
                 <a:ea typeface="Canva Sans Bold"/>
-                <a:cs typeface="Canva Sans Bold"/>
+                <a:cs typeface="!Khmer OS Siemreap" panose="02000500000000020004" pitchFamily="2" charset="0"/>
                 <a:sym typeface="Canva Sans Bold"/>
               </a:rPr>
               <a:t>Allocated Tab</a:t>
@@ -4430,17 +5980,62 @@
               </a:spcBef>
             </a:pPr>
             <a:r>
-              <a:rPr lang="en-US" sz="3999">
-                <a:solidFill>
-                  <a:srgbClr val="000000"/>
-                </a:solidFill>
-                <a:latin typeface="Canva Sans"/>
-                <a:ea typeface="Canva Sans"/>
-                <a:cs typeface="Canva Sans"/>
-                <a:sym typeface="Canva Sans"/>
-              </a:rPr>
-              <a:t>Tab "Allocated" shows the order which is enough.</a:t>
-            </a:r>
+              <a:rPr lang="en-US" sz="2000" dirty="0">
+                <a:solidFill>
+                  <a:srgbClr val="000000"/>
+                </a:solidFill>
+                <a:latin typeface="!Khmer OS Siemreap" panose="02000500000000020004" pitchFamily="2" charset="0"/>
+                <a:ea typeface="Canva Sans"/>
+                <a:cs typeface="!Khmer OS Siemreap" panose="02000500000000020004" pitchFamily="2" charset="0"/>
+                <a:sym typeface="Canva Sans"/>
+              </a:rPr>
+              <a:t>Tab "Allocated" </a:t>
+            </a:r>
+            <a:r>
+              <a:rPr lang="km-KH" sz="2000" dirty="0">
+                <a:solidFill>
+                  <a:srgbClr val="000000"/>
+                </a:solidFill>
+                <a:latin typeface="!Khmer OS Siemreap" panose="02000500000000020004" pitchFamily="2" charset="0"/>
+                <a:ea typeface="Canva Sans"/>
+                <a:cs typeface="!Khmer OS Siemreap" panose="02000500000000020004" pitchFamily="2" charset="0"/>
+                <a:sym typeface="Canva Sans"/>
+              </a:rPr>
+              <a:t>បង្ហាញពី​ </a:t>
+            </a:r>
+            <a:r>
+              <a:rPr lang="en-US" sz="2000" dirty="0">
+                <a:solidFill>
+                  <a:srgbClr val="000000"/>
+                </a:solidFill>
+                <a:latin typeface="!Khmer OS Siemreap" panose="02000500000000020004" pitchFamily="2" charset="0"/>
+                <a:ea typeface="Canva Sans"/>
+                <a:cs typeface="!Khmer OS Siemreap" panose="02000500000000020004" pitchFamily="2" charset="0"/>
+                <a:sym typeface="Canva Sans"/>
+              </a:rPr>
+              <a:t>order </a:t>
+            </a:r>
+            <a:r>
+              <a:rPr lang="km-KH" sz="2000" dirty="0">
+                <a:solidFill>
+                  <a:srgbClr val="000000"/>
+                </a:solidFill>
+                <a:latin typeface="!Khmer OS Siemreap" panose="02000500000000020004" pitchFamily="2" charset="0"/>
+                <a:ea typeface="Canva Sans"/>
+                <a:cs typeface="!Khmer OS Siemreap" panose="02000500000000020004" pitchFamily="2" charset="0"/>
+                <a:sym typeface="Canva Sans"/>
+              </a:rPr>
+              <a:t>ណាដែលមានចំនួនគ្រប់។</a:t>
+            </a:r>
+            <a:endParaRPr lang="en-US" sz="2000" dirty="0">
+              <a:solidFill>
+                <a:srgbClr val="000000"/>
+              </a:solidFill>
+              <a:latin typeface="!Khmer OS Siemreap" panose="02000500000000020004" pitchFamily="2" charset="0"/>
+              <a:ea typeface="Canva Sans"/>
+              <a:cs typeface="!Khmer OS Siemreap" panose="02000500000000020004" pitchFamily="2" charset="0"/>
+              <a:sym typeface="Canva Sans"/>
+            </a:endParaRPr>
           </a:p>
           <a:p>
             <a:pPr algn="l">
@@ -4452,56 +6047,365 @@
               </a:spcBef>
             </a:pPr>
             <a:r>
-              <a:rPr lang="en-US" sz="3999">
-                <a:solidFill>
-                  <a:srgbClr val="000000"/>
-                </a:solidFill>
-                <a:latin typeface="Canva Sans"/>
-                <a:ea typeface="Canva Sans"/>
-                <a:cs typeface="Canva Sans"/>
-                <a:sym typeface="Canva Sans"/>
-              </a:rPr>
-              <a:t>If we want to make it unallocated (Allocated to Unallocated), we need to:</a:t>
-            </a:r>
-          </a:p>
-          <a:p>
-            <a:pPr algn="l" marL="863599" indent="-431800" lvl="1">
+              <a:rPr lang="km-KH" sz="2000" dirty="0">
+                <a:solidFill>
+                  <a:srgbClr val="000000"/>
+                </a:solidFill>
+                <a:latin typeface="!Khmer OS Siemreap" panose="02000500000000020004" pitchFamily="2" charset="0"/>
+                <a:ea typeface="Canva Sans"/>
+                <a:cs typeface="!Khmer OS Siemreap" panose="02000500000000020004" pitchFamily="2" charset="0"/>
+                <a:sym typeface="Canva Sans"/>
+              </a:rPr>
+              <a:t>ប្រសិនបើយើងចង់ធ្វើឲ្យវា </a:t>
+            </a:r>
+            <a:r>
+              <a:rPr lang="en-US" sz="2000" dirty="0">
+                <a:solidFill>
+                  <a:srgbClr val="000000"/>
+                </a:solidFill>
+                <a:latin typeface="!Khmer OS Siemreap" panose="02000500000000020004" pitchFamily="2" charset="0"/>
+                <a:ea typeface="Canva Sans"/>
+                <a:cs typeface="!Khmer OS Siemreap" panose="02000500000000020004" pitchFamily="2" charset="0"/>
+                <a:sym typeface="Canva Sans"/>
+              </a:rPr>
+              <a:t>unallocated (Allocated </a:t>
+            </a:r>
+            <a:r>
+              <a:rPr lang="km-KH" sz="2000" dirty="0">
+                <a:solidFill>
+                  <a:srgbClr val="000000"/>
+                </a:solidFill>
+                <a:latin typeface="!Khmer OS Siemreap" panose="02000500000000020004" pitchFamily="2" charset="0"/>
+                <a:ea typeface="Canva Sans"/>
+                <a:cs typeface="!Khmer OS Siemreap" panose="02000500000000020004" pitchFamily="2" charset="0"/>
+                <a:sym typeface="Canva Sans"/>
+              </a:rPr>
+              <a:t>ទៅជា</a:t>
+            </a:r>
+            <a:r>
+              <a:rPr lang="en-US" sz="2000" dirty="0">
+                <a:solidFill>
+                  <a:srgbClr val="000000"/>
+                </a:solidFill>
+                <a:latin typeface="!Khmer OS Siemreap" panose="02000500000000020004" pitchFamily="2" charset="0"/>
+                <a:ea typeface="Canva Sans"/>
+                <a:cs typeface="!Khmer OS Siemreap" panose="02000500000000020004" pitchFamily="2" charset="0"/>
+                <a:sym typeface="Canva Sans"/>
+              </a:rPr>
+              <a:t> Unallocated)</a:t>
+            </a:r>
+            <a:r>
+              <a:rPr lang="km-KH" sz="2000" dirty="0">
+                <a:solidFill>
+                  <a:srgbClr val="000000"/>
+                </a:solidFill>
+                <a:latin typeface="!Khmer OS Siemreap" panose="02000500000000020004" pitchFamily="2" charset="0"/>
+                <a:ea typeface="Canva Sans"/>
+                <a:cs typeface="!Khmer OS Siemreap" panose="02000500000000020004" pitchFamily="2" charset="0"/>
+                <a:sym typeface="Canva Sans"/>
+              </a:rPr>
+              <a:t> ពួកយើងត្រូវ៖</a:t>
+            </a:r>
+            <a:endParaRPr lang="en-US" sz="2000" dirty="0">
+              <a:solidFill>
+                <a:srgbClr val="000000"/>
+              </a:solidFill>
+              <a:latin typeface="!Khmer OS Siemreap" panose="02000500000000020004" pitchFamily="2" charset="0"/>
+              <a:ea typeface="Canva Sans"/>
+              <a:cs typeface="!Khmer OS Siemreap" panose="02000500000000020004" pitchFamily="2" charset="0"/>
+              <a:sym typeface="Canva Sans"/>
+            </a:endParaRPr>
+          </a:p>
+          <a:p>
+            <a:pPr marL="863599" lvl="1" indent="-431800" algn="l">
               <a:lnSpc>
                 <a:spcPts val="5599"/>
               </a:lnSpc>
-              <a:buAutoNum type="arabicPeriod" startAt="1"/>
+              <a:buAutoNum type="arabicPeriod"/>
             </a:pPr>
             <a:r>
-              <a:rPr lang="en-US" sz="3999">
-                <a:solidFill>
-                  <a:srgbClr val="000000"/>
-                </a:solidFill>
-                <a:latin typeface="Canva Sans"/>
-                <a:ea typeface="Canva Sans"/>
-                <a:cs typeface="Canva Sans"/>
-                <a:sym typeface="Canva Sans"/>
-              </a:rPr>
-              <a:t>Select one row by clicking on it (it will highlight blue).</a:t>
-            </a:r>
-          </a:p>
-          <a:p>
-            <a:pPr algn="l" marL="863599" indent="-431800" lvl="1">
+              <a:rPr lang="km-KH" sz="2000" dirty="0">
+                <a:solidFill>
+                  <a:srgbClr val="000000"/>
+                </a:solidFill>
+                <a:latin typeface="!Khmer OS Siemreap" panose="02000500000000020004" pitchFamily="2" charset="0"/>
+                <a:ea typeface="Canva Sans"/>
+                <a:cs typeface="!Khmer OS Siemreap" panose="02000500000000020004" pitchFamily="2" charset="0"/>
+                <a:sym typeface="Canva Sans"/>
+              </a:rPr>
+              <a:t>ជ្រើសរើសជួរដោយមួយដោយចុចលើវា </a:t>
+            </a:r>
+            <a:r>
+              <a:rPr lang="en-US" sz="2000" dirty="0">
+                <a:solidFill>
+                  <a:srgbClr val="000000"/>
+                </a:solidFill>
+                <a:latin typeface="!Khmer OS Siemreap" panose="02000500000000020004" pitchFamily="2" charset="0"/>
+                <a:ea typeface="Canva Sans"/>
+                <a:cs typeface="!Khmer OS Siemreap" panose="02000500000000020004" pitchFamily="2" charset="0"/>
+                <a:sym typeface="Canva Sans"/>
+              </a:rPr>
+              <a:t>(</a:t>
+            </a:r>
+            <a:r>
+              <a:rPr lang="km-KH" sz="2000" dirty="0">
+                <a:solidFill>
+                  <a:srgbClr val="000000"/>
+                </a:solidFill>
+                <a:latin typeface="!Khmer OS Siemreap" panose="02000500000000020004" pitchFamily="2" charset="0"/>
+                <a:ea typeface="Canva Sans"/>
+                <a:cs typeface="!Khmer OS Siemreap" panose="02000500000000020004" pitchFamily="2" charset="0"/>
+                <a:sym typeface="Canva Sans"/>
+              </a:rPr>
+              <a:t>វានឹងហាយឡាយពណ៌ខៀវ</a:t>
+            </a:r>
+            <a:r>
+              <a:rPr lang="en-US" sz="2000" dirty="0">
+                <a:solidFill>
+                  <a:srgbClr val="000000"/>
+                </a:solidFill>
+                <a:latin typeface="!Khmer OS Siemreap" panose="02000500000000020004" pitchFamily="2" charset="0"/>
+                <a:ea typeface="Canva Sans"/>
+                <a:cs typeface="!Khmer OS Siemreap" panose="02000500000000020004" pitchFamily="2" charset="0"/>
+                <a:sym typeface="Canva Sans"/>
+              </a:rPr>
+              <a:t>)</a:t>
+            </a:r>
+            <a:r>
+              <a:rPr lang="km-KH" sz="2000" dirty="0">
+                <a:solidFill>
+                  <a:srgbClr val="000000"/>
+                </a:solidFill>
+                <a:latin typeface="!Khmer OS Siemreap" panose="02000500000000020004" pitchFamily="2" charset="0"/>
+                <a:ea typeface="Canva Sans"/>
+                <a:cs typeface="!Khmer OS Siemreap" panose="02000500000000020004" pitchFamily="2" charset="0"/>
+                <a:sym typeface="Canva Sans"/>
+              </a:rPr>
+              <a:t>។</a:t>
+            </a:r>
+            <a:endParaRPr lang="en-US" sz="2000" dirty="0">
+              <a:solidFill>
+                <a:srgbClr val="000000"/>
+              </a:solidFill>
+              <a:latin typeface="!Khmer OS Siemreap" panose="02000500000000020004" pitchFamily="2" charset="0"/>
+              <a:ea typeface="Canva Sans"/>
+              <a:cs typeface="!Khmer OS Siemreap" panose="02000500000000020004" pitchFamily="2" charset="0"/>
+              <a:sym typeface="Canva Sans"/>
+            </a:endParaRPr>
+          </a:p>
+          <a:p>
+            <a:pPr marL="863599" lvl="1" indent="-431800" algn="l">
               <a:lnSpc>
                 <a:spcPts val="5599"/>
               </a:lnSpc>
-              <a:buAutoNum type="arabicPeriod" startAt="1"/>
+              <a:buAutoNum type="arabicPeriod"/>
             </a:pPr>
             <a:r>
-              <a:rPr lang="en-US" sz="3999">
-                <a:solidFill>
-                  <a:srgbClr val="000000"/>
-                </a:solidFill>
-                <a:latin typeface="Canva Sans"/>
-                <a:ea typeface="Canva Sans"/>
-                <a:cs typeface="Canva Sans"/>
-                <a:sym typeface="Canva Sans"/>
-              </a:rPr>
-              <a:t>And then click on button "Unallocation"</a:t>
+              <a:rPr lang="km-KH" sz="2000" dirty="0">
+                <a:solidFill>
+                  <a:srgbClr val="000000"/>
+                </a:solidFill>
+                <a:latin typeface="!Khmer OS Siemreap" panose="02000500000000020004" pitchFamily="2" charset="0"/>
+                <a:ea typeface="Canva Sans"/>
+                <a:cs typeface="!Khmer OS Siemreap" panose="02000500000000020004" pitchFamily="2" charset="0"/>
+                <a:sym typeface="Canva Sans"/>
+              </a:rPr>
+              <a:t>និងបន្ទាប់មកចុចលើប៊ូតុង </a:t>
+            </a:r>
+            <a:r>
+              <a:rPr lang="en-US" sz="2000" dirty="0">
+                <a:solidFill>
+                  <a:srgbClr val="000000"/>
+                </a:solidFill>
+                <a:latin typeface="!Khmer OS Siemreap" panose="02000500000000020004" pitchFamily="2" charset="0"/>
+                <a:ea typeface="Canva Sans"/>
+                <a:cs typeface="!Khmer OS Siemreap" panose="02000500000000020004" pitchFamily="2" charset="0"/>
+                <a:sym typeface="Canva Sans"/>
+              </a:rPr>
+              <a:t>"</a:t>
+            </a:r>
+            <a:r>
+              <a:rPr lang="en-US" sz="2000" dirty="0" err="1">
+                <a:solidFill>
+                  <a:srgbClr val="000000"/>
+                </a:solidFill>
+                <a:latin typeface="!Khmer OS Siemreap" panose="02000500000000020004" pitchFamily="2" charset="0"/>
+                <a:ea typeface="Canva Sans"/>
+                <a:cs typeface="!Khmer OS Siemreap" panose="02000500000000020004" pitchFamily="2" charset="0"/>
+                <a:sym typeface="Canva Sans"/>
+              </a:rPr>
+              <a:t>Unallocation</a:t>
+            </a:r>
+            <a:r>
+              <a:rPr lang="en-US" sz="2000" dirty="0">
+                <a:solidFill>
+                  <a:srgbClr val="000000"/>
+                </a:solidFill>
+                <a:latin typeface="!Khmer OS Siemreap" panose="02000500000000020004" pitchFamily="2" charset="0"/>
+                <a:ea typeface="Canva Sans"/>
+                <a:cs typeface="!Khmer OS Siemreap" panose="02000500000000020004" pitchFamily="2" charset="0"/>
+                <a:sym typeface="Canva Sans"/>
+              </a:rPr>
+              <a:t>"</a:t>
+            </a:r>
+          </a:p>
+        </p:txBody>
+      </p:sp>
+      <p:sp>
+        <p:nvSpPr>
+          <p:cNvPr id="4" name="TextBox 3">
+            <a:extLst>
+              <a:ext uri="{FF2B5EF4-FFF2-40B4-BE49-F238E27FC236}">
+                <a16:creationId xmlns:a16="http://schemas.microsoft.com/office/drawing/2014/main" id="{150D350E-D22A-F536-8B42-116559C930ED}"/>
+              </a:ext>
+            </a:extLst>
+          </p:cNvPr>
+          <p:cNvSpPr txBox="1"/>
+          <p:nvPr/>
+        </p:nvSpPr>
+        <p:spPr>
+          <a:xfrm>
+            <a:off x="1028700" y="4440633"/>
+            <a:ext cx="16230600" cy="3569760"/>
+          </a:xfrm>
+          <a:prstGeom prst="rect">
+            <a:avLst/>
+          </a:prstGeom>
+          <a:noFill/>
+        </p:spPr>
+        <p:txBody>
+          <a:bodyPr wrap="square">
+            <a:spAutoFit/>
+          </a:bodyPr>
+          <a:lstStyle/>
+          <a:p>
+            <a:pPr algn="l">
+              <a:lnSpc>
+                <a:spcPts val="5599"/>
+              </a:lnSpc>
+              <a:spcBef>
+                <a:spcPct val="0"/>
+              </a:spcBef>
+            </a:pPr>
+            <a:r>
+              <a:rPr lang="en-US" sz="2000" b="1" dirty="0">
+                <a:solidFill>
+                  <a:srgbClr val="000000"/>
+                </a:solidFill>
+                <a:latin typeface="!Khmer OS Siemreap" panose="02000500000000020004" pitchFamily="2" charset="0"/>
+                <a:ea typeface="Canva Sans Bold"/>
+                <a:cs typeface="!Khmer OS Siemreap" panose="02000500000000020004" pitchFamily="2" charset="0"/>
+                <a:sym typeface="Canva Sans Bold"/>
+              </a:rPr>
+              <a:t>Allocated Tab</a:t>
+            </a:r>
+          </a:p>
+          <a:p>
+            <a:pPr algn="l">
+              <a:lnSpc>
+                <a:spcPts val="5599"/>
+              </a:lnSpc>
+              <a:spcBef>
+                <a:spcPct val="0"/>
+              </a:spcBef>
+            </a:pPr>
+            <a:r>
+              <a:rPr lang="en-US" sz="2000" dirty="0">
+                <a:solidFill>
+                  <a:srgbClr val="000000"/>
+                </a:solidFill>
+                <a:latin typeface="!Khmer OS Siemreap" panose="02000500000000020004" pitchFamily="2" charset="0"/>
+                <a:ea typeface="Canva Sans"/>
+                <a:cs typeface="!Khmer OS Siemreap" panose="02000500000000020004" pitchFamily="2" charset="0"/>
+                <a:sym typeface="Canva Sans"/>
+              </a:rPr>
+              <a:t>Tab "Allocated" shows the order which is enough.</a:t>
+            </a:r>
+          </a:p>
+          <a:p>
+            <a:pPr algn="l">
+              <a:lnSpc>
+                <a:spcPts val="5599"/>
+              </a:lnSpc>
+              <a:spcBef>
+                <a:spcPct val="0"/>
+              </a:spcBef>
+            </a:pPr>
+            <a:r>
+              <a:rPr lang="en-US" sz="2000" dirty="0">
+                <a:solidFill>
+                  <a:srgbClr val="000000"/>
+                </a:solidFill>
+                <a:latin typeface="!Khmer OS Siemreap" panose="02000500000000020004" pitchFamily="2" charset="0"/>
+                <a:ea typeface="Canva Sans"/>
+                <a:cs typeface="!Khmer OS Siemreap" panose="02000500000000020004" pitchFamily="2" charset="0"/>
+                <a:sym typeface="Canva Sans"/>
+              </a:rPr>
+              <a:t>If we want to make it unallocated (Allocated to Unallocated), we need to:</a:t>
+            </a:r>
+          </a:p>
+          <a:p>
+            <a:pPr marL="863599" lvl="1" indent="-431800" algn="l">
+              <a:lnSpc>
+                <a:spcPts val="5599"/>
+              </a:lnSpc>
+              <a:buAutoNum type="arabicPeriod"/>
+            </a:pPr>
+            <a:r>
+              <a:rPr lang="en-US" sz="2000" dirty="0">
+                <a:solidFill>
+                  <a:srgbClr val="000000"/>
+                </a:solidFill>
+                <a:latin typeface="!Khmer OS Siemreap" panose="02000500000000020004" pitchFamily="2" charset="0"/>
+                <a:ea typeface="Canva Sans"/>
+                <a:cs typeface="!Khmer OS Siemreap" panose="02000500000000020004" pitchFamily="2" charset="0"/>
+                <a:sym typeface="Canva Sans"/>
+              </a:rPr>
+              <a:t>Select one row by clicking on it (it will highlight blue).</a:t>
+            </a:r>
+          </a:p>
+          <a:p>
+            <a:pPr marL="863599" lvl="1" indent="-431800" algn="l">
+              <a:lnSpc>
+                <a:spcPts val="5599"/>
+              </a:lnSpc>
+              <a:buAutoNum type="arabicPeriod"/>
+            </a:pPr>
+            <a:r>
+              <a:rPr lang="en-US" sz="2000" dirty="0">
+                <a:solidFill>
+                  <a:srgbClr val="000000"/>
+                </a:solidFill>
+                <a:latin typeface="!Khmer OS Siemreap" panose="02000500000000020004" pitchFamily="2" charset="0"/>
+                <a:ea typeface="Canva Sans"/>
+                <a:cs typeface="!Khmer OS Siemreap" panose="02000500000000020004" pitchFamily="2" charset="0"/>
+                <a:sym typeface="Canva Sans"/>
+              </a:rPr>
+              <a:t>And then click on button "</a:t>
+            </a:r>
+            <a:r>
+              <a:rPr lang="en-US" sz="2000" dirty="0" err="1">
+                <a:solidFill>
+                  <a:srgbClr val="000000"/>
+                </a:solidFill>
+                <a:latin typeface="!Khmer OS Siemreap" panose="02000500000000020004" pitchFamily="2" charset="0"/>
+                <a:ea typeface="Canva Sans"/>
+                <a:cs typeface="!Khmer OS Siemreap" panose="02000500000000020004" pitchFamily="2" charset="0"/>
+                <a:sym typeface="Canva Sans"/>
+              </a:rPr>
+              <a:t>Unallocation</a:t>
+            </a:r>
+            <a:r>
+              <a:rPr lang="en-US" sz="2000" dirty="0">
+                <a:solidFill>
+                  <a:srgbClr val="000000"/>
+                </a:solidFill>
+                <a:latin typeface="!Khmer OS Siemreap" panose="02000500000000020004" pitchFamily="2" charset="0"/>
+                <a:ea typeface="Canva Sans"/>
+                <a:cs typeface="!Khmer OS Siemreap" panose="02000500000000020004" pitchFamily="2" charset="0"/>
+                <a:sym typeface="Canva Sans"/>
+              </a:rPr>
+              <a:t>"</a:t>
             </a:r>
           </a:p>
         </p:txBody>
@@ -4795,4 +6699,10 @@
   <a:objectDefaults/>
   <a:extraClrSchemeLst/>
 </a:theme>
+</file>
+
+<file path=docMetadata/LabelInfo.xml><?xml version="1.0" encoding="utf-8"?>
+<clbl:labelList xmlns:clbl="http://schemas.microsoft.com/office/2020/mipLabelMetadata">
+  <clbl:label id="{89db4e91-bad5-4fd0-9ca4-c06485916e3a}" enabled="1" method="Standard" siteId="{f66fae02-5d36-495b-bfe0-78a6ff9f8e6e}" contentBits="0" removed="0"/>
+</clbl:labelList>
 </file>